--- a/Assets/PREZENTACIA/Андрианов Даниил(ПЛАТФОРМЕР)КванториумГаз.pptx
+++ b/Assets/PREZENTACIA/Андрианов Даниил(ПЛАТФОРМЕР)КванториумГаз.pptx
@@ -5,18 +5,16 @@
     <p:sldMasterId id="2147483648" r:id="rId1"/>
   </p:sldMasterIdLst>
   <p:notesMasterIdLst>
-    <p:notesMasterId r:id="rId4"/>
+    <p:notesMasterId r:id="rId9"/>
   </p:notesMasterIdLst>
   <p:sldIdLst>
-    <p:sldId id="256" r:id="rId3"/>
-    <p:sldId id="257" r:id="rId5"/>
-    <p:sldId id="258" r:id="rId6"/>
-    <p:sldId id="259" r:id="rId7"/>
-    <p:sldId id="260" r:id="rId8"/>
-    <p:sldId id="261" r:id="rId9"/>
-    <p:sldId id="262" r:id="rId10"/>
-    <p:sldId id="263" r:id="rId11"/>
-    <p:sldId id="264" r:id="rId12"/>
+    <p:sldId id="256" r:id="rId2"/>
+    <p:sldId id="259" r:id="rId3"/>
+    <p:sldId id="260" r:id="rId4"/>
+    <p:sldId id="261" r:id="rId5"/>
+    <p:sldId id="262" r:id="rId6"/>
+    <p:sldId id="263" r:id="rId7"/>
+    <p:sldId id="264" r:id="rId8"/>
   </p:sldIdLst>
   <p:sldSz cx="12192000" cy="6858000"/>
   <p:notesSz cx="6858000" cy="9144000"/>
@@ -216,6 +214,7 @@
           <a:p>
             <a:fld id="{46D652B2-8C6E-419B-8E93-813F678ADC08}" type="datetimeFigureOut">
               <a:rPr lang="ru-RU" smtClean="0"/>
+              <a:t>20.05.2026</a:t>
             </a:fld>
             <a:endParaRPr lang="ru-RU"/>
           </a:p>
@@ -279,42 +278,37 @@
           <a:p>
             <a:pPr lvl="0"/>
             <a:r>
-              <a:rPr lang="ru-RU" smtClean="0"/>
+              <a:rPr lang="ru-RU"/>
               <a:t>Образец текста</a:t>
             </a:r>
-            <a:endParaRPr lang="ru-RU" smtClean="0"/>
           </a:p>
           <a:p>
             <a:pPr lvl="1"/>
             <a:r>
-              <a:rPr lang="ru-RU" smtClean="0"/>
+              <a:rPr lang="ru-RU"/>
               <a:t>Второй уровень</a:t>
             </a:r>
-            <a:endParaRPr lang="ru-RU" smtClean="0"/>
           </a:p>
           <a:p>
             <a:pPr lvl="2"/>
             <a:r>
-              <a:rPr lang="ru-RU" smtClean="0"/>
+              <a:rPr lang="ru-RU"/>
               <a:t>Третий уровень</a:t>
             </a:r>
-            <a:endParaRPr lang="ru-RU" smtClean="0"/>
           </a:p>
           <a:p>
             <a:pPr lvl="3"/>
             <a:r>
-              <a:rPr lang="ru-RU" smtClean="0"/>
+              <a:rPr lang="ru-RU"/>
               <a:t>Четвертый уровень</a:t>
             </a:r>
-            <a:endParaRPr lang="ru-RU" smtClean="0"/>
           </a:p>
           <a:p>
             <a:pPr lvl="4"/>
             <a:r>
-              <a:rPr lang="ru-RU" smtClean="0"/>
+              <a:rPr lang="ru-RU"/>
               <a:t>Пятый уровень</a:t>
             </a:r>
-            <a:endParaRPr lang="ru-RU"/>
           </a:p>
         </p:txBody>
       </p:sp>
@@ -378,6 +372,7 @@
           <a:p>
             <a:fld id="{C6C6DC3D-C717-495C-B489-C044A339A551}" type="slidenum">
               <a:rPr lang="ru-RU" smtClean="0"/>
+              <a:t>‹#›</a:t>
             </a:fld>
             <a:endParaRPr lang="ru-RU"/>
           </a:p>
@@ -490,12 +485,19 @@
         <p:cNvGrpSpPr/>
         <p:nvPr/>
       </p:nvGrpSpPr>
-      <p:grpSpPr/>
+      <p:grpSpPr>
+        <a:xfrm>
+          <a:off x="0" y="0"/>
+          <a:ext cx="0" cy="0"/>
+          <a:chOff x="0" y="0"/>
+          <a:chExt cx="0" cy="0"/>
+        </a:xfrm>
+      </p:grpSpPr>
       <p:sp>
         <p:nvSpPr>
           <p:cNvPr id="2" name="Замещающий образ слайда 1"/>
           <p:cNvSpPr>
-            <a:spLocks noGrp="1"/>
+            <a:spLocks noGrp="1" noRot="1" noChangeAspect="1"/>
           </p:cNvSpPr>
           <p:nvPr>
             <p:ph type="sldImg" idx="2"/>
@@ -516,6 +518,7 @@
         <p:spPr/>
         <p:txBody>
           <a:bodyPr/>
+          <a:lstStyle/>
           <a:p>
             <a:endParaRPr lang="ru-RU" altLang="en-US"/>
           </a:p>
@@ -574,7 +577,6 @@
               <a:rPr lang="ru-RU"/>
               <a:t>Образец заголовка</a:t>
             </a:r>
-            <a:endParaRPr lang="ru-RU"/>
           </a:p>
         </p:txBody>
       </p:sp>
@@ -639,7 +641,6 @@
               <a:rPr lang="ru-RU"/>
               <a:t>Образец подзаголовка</a:t>
             </a:r>
-            <a:endParaRPr lang="ru-RU"/>
           </a:p>
         </p:txBody>
       </p:sp>
@@ -660,6 +661,7 @@
           <a:p>
             <a:fld id="{6731BE5E-5333-4BD4-98F4-AC5F1DC5955D}" type="datetimeFigureOut">
               <a:rPr lang="ru-RU" smtClean="0"/>
+              <a:t>20.05.2026</a:t>
             </a:fld>
             <a:endParaRPr lang="ru-RU"/>
           </a:p>
@@ -701,6 +703,7 @@
           <a:p>
             <a:fld id="{1DA346F6-9D0E-46BC-851D-41D1A5CE4D70}" type="slidenum">
               <a:rPr lang="ru-RU" smtClean="0"/>
+              <a:t>‹#›</a:t>
             </a:fld>
             <a:endParaRPr lang="ru-RU"/>
           </a:p>
@@ -750,7 +753,6 @@
               <a:rPr lang="ru-RU"/>
               <a:t>Образец заголовка</a:t>
             </a:r>
-            <a:endParaRPr lang="ru-RU"/>
           </a:p>
         </p:txBody>
       </p:sp>
@@ -774,7 +776,6 @@
               <a:rPr lang="ru-RU"/>
               <a:t>Образец текста</a:t>
             </a:r>
-            <a:endParaRPr lang="ru-RU"/>
           </a:p>
           <a:p>
             <a:pPr lvl="1"/>
@@ -782,7 +783,6 @@
               <a:rPr lang="ru-RU"/>
               <a:t>Второй уровень</a:t>
             </a:r>
-            <a:endParaRPr lang="ru-RU"/>
           </a:p>
           <a:p>
             <a:pPr lvl="2"/>
@@ -790,7 +790,6 @@
               <a:rPr lang="ru-RU"/>
               <a:t>Третий уровень</a:t>
             </a:r>
-            <a:endParaRPr lang="ru-RU"/>
           </a:p>
           <a:p>
             <a:pPr lvl="3"/>
@@ -798,7 +797,6 @@
               <a:rPr lang="ru-RU"/>
               <a:t>Четвертый уровень</a:t>
             </a:r>
-            <a:endParaRPr lang="ru-RU"/>
           </a:p>
           <a:p>
             <a:pPr lvl="4"/>
@@ -806,7 +804,6 @@
               <a:rPr lang="ru-RU"/>
               <a:t>Пятый уровень</a:t>
             </a:r>
-            <a:endParaRPr lang="ru-RU"/>
           </a:p>
         </p:txBody>
       </p:sp>
@@ -827,6 +824,7 @@
           <a:p>
             <a:fld id="{6731BE5E-5333-4BD4-98F4-AC5F1DC5955D}" type="datetimeFigureOut">
               <a:rPr lang="ru-RU" smtClean="0"/>
+              <a:t>20.05.2026</a:t>
             </a:fld>
             <a:endParaRPr lang="ru-RU"/>
           </a:p>
@@ -868,6 +866,7 @@
           <a:p>
             <a:fld id="{1DA346F6-9D0E-46BC-851D-41D1A5CE4D70}" type="slidenum">
               <a:rPr lang="ru-RU" smtClean="0"/>
+              <a:t>‹#›</a:t>
             </a:fld>
             <a:endParaRPr lang="ru-RU"/>
           </a:p>
@@ -922,7 +921,6 @@
               <a:rPr lang="ru-RU"/>
               <a:t>Образец заголовка</a:t>
             </a:r>
-            <a:endParaRPr lang="ru-RU"/>
           </a:p>
         </p:txBody>
       </p:sp>
@@ -951,7 +949,6 @@
               <a:rPr lang="ru-RU"/>
               <a:t>Образец текста</a:t>
             </a:r>
-            <a:endParaRPr lang="ru-RU"/>
           </a:p>
           <a:p>
             <a:pPr lvl="1"/>
@@ -959,7 +956,6 @@
               <a:rPr lang="ru-RU"/>
               <a:t>Второй уровень</a:t>
             </a:r>
-            <a:endParaRPr lang="ru-RU"/>
           </a:p>
           <a:p>
             <a:pPr lvl="2"/>
@@ -967,7 +963,6 @@
               <a:rPr lang="ru-RU"/>
               <a:t>Третий уровень</a:t>
             </a:r>
-            <a:endParaRPr lang="ru-RU"/>
           </a:p>
           <a:p>
             <a:pPr lvl="3"/>
@@ -975,7 +970,6 @@
               <a:rPr lang="ru-RU"/>
               <a:t>Четвертый уровень</a:t>
             </a:r>
-            <a:endParaRPr lang="ru-RU"/>
           </a:p>
           <a:p>
             <a:pPr lvl="4"/>
@@ -983,7 +977,6 @@
               <a:rPr lang="ru-RU"/>
               <a:t>Пятый уровень</a:t>
             </a:r>
-            <a:endParaRPr lang="ru-RU"/>
           </a:p>
         </p:txBody>
       </p:sp>
@@ -1004,6 +997,7 @@
           <a:p>
             <a:fld id="{6731BE5E-5333-4BD4-98F4-AC5F1DC5955D}" type="datetimeFigureOut">
               <a:rPr lang="ru-RU" smtClean="0"/>
+              <a:t>20.05.2026</a:t>
             </a:fld>
             <a:endParaRPr lang="ru-RU"/>
           </a:p>
@@ -1045,6 +1039,7 @@
           <a:p>
             <a:fld id="{1DA346F6-9D0E-46BC-851D-41D1A5CE4D70}" type="slidenum">
               <a:rPr lang="ru-RU" smtClean="0"/>
+              <a:t>‹#›</a:t>
             </a:fld>
             <a:endParaRPr lang="ru-RU"/>
           </a:p>
@@ -1094,7 +1089,6 @@
               <a:rPr lang="ru-RU"/>
               <a:t>Образец заголовка</a:t>
             </a:r>
-            <a:endParaRPr lang="ru-RU"/>
           </a:p>
         </p:txBody>
       </p:sp>
@@ -1118,7 +1112,6 @@
               <a:rPr lang="ru-RU"/>
               <a:t>Образец текста</a:t>
             </a:r>
-            <a:endParaRPr lang="ru-RU"/>
           </a:p>
           <a:p>
             <a:pPr lvl="1"/>
@@ -1126,7 +1119,6 @@
               <a:rPr lang="ru-RU"/>
               <a:t>Второй уровень</a:t>
             </a:r>
-            <a:endParaRPr lang="ru-RU"/>
           </a:p>
           <a:p>
             <a:pPr lvl="2"/>
@@ -1134,7 +1126,6 @@
               <a:rPr lang="ru-RU"/>
               <a:t>Третий уровень</a:t>
             </a:r>
-            <a:endParaRPr lang="ru-RU"/>
           </a:p>
           <a:p>
             <a:pPr lvl="3"/>
@@ -1142,7 +1133,6 @@
               <a:rPr lang="ru-RU"/>
               <a:t>Четвертый уровень</a:t>
             </a:r>
-            <a:endParaRPr lang="ru-RU"/>
           </a:p>
           <a:p>
             <a:pPr lvl="4"/>
@@ -1150,7 +1140,6 @@
               <a:rPr lang="ru-RU"/>
               <a:t>Пятый уровень</a:t>
             </a:r>
-            <a:endParaRPr lang="ru-RU"/>
           </a:p>
         </p:txBody>
       </p:sp>
@@ -1171,6 +1160,7 @@
           <a:p>
             <a:fld id="{6731BE5E-5333-4BD4-98F4-AC5F1DC5955D}" type="datetimeFigureOut">
               <a:rPr lang="ru-RU" smtClean="0"/>
+              <a:t>20.05.2026</a:t>
             </a:fld>
             <a:endParaRPr lang="ru-RU"/>
           </a:p>
@@ -1212,6 +1202,7 @@
           <a:p>
             <a:fld id="{1DA346F6-9D0E-46BC-851D-41D1A5CE4D70}" type="slidenum">
               <a:rPr lang="ru-RU" smtClean="0"/>
+              <a:t>‹#›</a:t>
             </a:fld>
             <a:endParaRPr lang="ru-RU"/>
           </a:p>
@@ -1270,7 +1261,6 @@
               <a:rPr lang="ru-RU"/>
               <a:t>Образец заголовка</a:t>
             </a:r>
-            <a:endParaRPr lang="ru-RU"/>
           </a:p>
         </p:txBody>
       </p:sp>
@@ -1390,7 +1380,6 @@
               <a:rPr lang="ru-RU"/>
               <a:t>Образец текста</a:t>
             </a:r>
-            <a:endParaRPr lang="ru-RU"/>
           </a:p>
         </p:txBody>
       </p:sp>
@@ -1411,6 +1400,7 @@
           <a:p>
             <a:fld id="{6731BE5E-5333-4BD4-98F4-AC5F1DC5955D}" type="datetimeFigureOut">
               <a:rPr lang="ru-RU" smtClean="0"/>
+              <a:t>20.05.2026</a:t>
             </a:fld>
             <a:endParaRPr lang="ru-RU"/>
           </a:p>
@@ -1452,6 +1442,7 @@
           <a:p>
             <a:fld id="{1DA346F6-9D0E-46BC-851D-41D1A5CE4D70}" type="slidenum">
               <a:rPr lang="ru-RU" smtClean="0"/>
+              <a:t>‹#›</a:t>
             </a:fld>
             <a:endParaRPr lang="ru-RU"/>
           </a:p>
@@ -1501,7 +1492,6 @@
               <a:rPr lang="ru-RU"/>
               <a:t>Образец заголовка</a:t>
             </a:r>
-            <a:endParaRPr lang="ru-RU"/>
           </a:p>
         </p:txBody>
       </p:sp>
@@ -1530,7 +1520,6 @@
               <a:rPr lang="ru-RU"/>
               <a:t>Образец текста</a:t>
             </a:r>
-            <a:endParaRPr lang="ru-RU"/>
           </a:p>
           <a:p>
             <a:pPr lvl="1"/>
@@ -1538,7 +1527,6 @@
               <a:rPr lang="ru-RU"/>
               <a:t>Второй уровень</a:t>
             </a:r>
-            <a:endParaRPr lang="ru-RU"/>
           </a:p>
           <a:p>
             <a:pPr lvl="2"/>
@@ -1546,7 +1534,6 @@
               <a:rPr lang="ru-RU"/>
               <a:t>Третий уровень</a:t>
             </a:r>
-            <a:endParaRPr lang="ru-RU"/>
           </a:p>
           <a:p>
             <a:pPr lvl="3"/>
@@ -1554,7 +1541,6 @@
               <a:rPr lang="ru-RU"/>
               <a:t>Четвертый уровень</a:t>
             </a:r>
-            <a:endParaRPr lang="ru-RU"/>
           </a:p>
           <a:p>
             <a:pPr lvl="4"/>
@@ -1562,7 +1548,6 @@
               <a:rPr lang="ru-RU"/>
               <a:t>Пятый уровень</a:t>
             </a:r>
-            <a:endParaRPr lang="ru-RU"/>
           </a:p>
         </p:txBody>
       </p:sp>
@@ -1591,7 +1576,6 @@
               <a:rPr lang="ru-RU"/>
               <a:t>Образец текста</a:t>
             </a:r>
-            <a:endParaRPr lang="ru-RU"/>
           </a:p>
           <a:p>
             <a:pPr lvl="1"/>
@@ -1599,7 +1583,6 @@
               <a:rPr lang="ru-RU"/>
               <a:t>Второй уровень</a:t>
             </a:r>
-            <a:endParaRPr lang="ru-RU"/>
           </a:p>
           <a:p>
             <a:pPr lvl="2"/>
@@ -1607,7 +1590,6 @@
               <a:rPr lang="ru-RU"/>
               <a:t>Третий уровень</a:t>
             </a:r>
-            <a:endParaRPr lang="ru-RU"/>
           </a:p>
           <a:p>
             <a:pPr lvl="3"/>
@@ -1615,7 +1597,6 @@
               <a:rPr lang="ru-RU"/>
               <a:t>Четвертый уровень</a:t>
             </a:r>
-            <a:endParaRPr lang="ru-RU"/>
           </a:p>
           <a:p>
             <a:pPr lvl="4"/>
@@ -1623,7 +1604,6 @@
               <a:rPr lang="ru-RU"/>
               <a:t>Пятый уровень</a:t>
             </a:r>
-            <a:endParaRPr lang="ru-RU"/>
           </a:p>
         </p:txBody>
       </p:sp>
@@ -1644,6 +1624,7 @@
           <a:p>
             <a:fld id="{6731BE5E-5333-4BD4-98F4-AC5F1DC5955D}" type="datetimeFigureOut">
               <a:rPr lang="ru-RU" smtClean="0"/>
+              <a:t>20.05.2026</a:t>
             </a:fld>
             <a:endParaRPr lang="ru-RU"/>
           </a:p>
@@ -1685,6 +1666,7 @@
           <a:p>
             <a:fld id="{1DA346F6-9D0E-46BC-851D-41D1A5CE4D70}" type="slidenum">
               <a:rPr lang="ru-RU" smtClean="0"/>
+              <a:t>‹#›</a:t>
             </a:fld>
             <a:endParaRPr lang="ru-RU"/>
           </a:p>
@@ -1739,7 +1721,6 @@
               <a:rPr lang="ru-RU"/>
               <a:t>Образец заголовка</a:t>
             </a:r>
-            <a:endParaRPr lang="ru-RU"/>
           </a:p>
         </p:txBody>
       </p:sp>
@@ -1805,7 +1786,6 @@
               <a:rPr lang="ru-RU"/>
               <a:t>Образец текста</a:t>
             </a:r>
-            <a:endParaRPr lang="ru-RU"/>
           </a:p>
         </p:txBody>
       </p:sp>
@@ -1834,7 +1814,6 @@
               <a:rPr lang="ru-RU"/>
               <a:t>Образец текста</a:t>
             </a:r>
-            <a:endParaRPr lang="ru-RU"/>
           </a:p>
           <a:p>
             <a:pPr lvl="1"/>
@@ -1842,7 +1821,6 @@
               <a:rPr lang="ru-RU"/>
               <a:t>Второй уровень</a:t>
             </a:r>
-            <a:endParaRPr lang="ru-RU"/>
           </a:p>
           <a:p>
             <a:pPr lvl="2"/>
@@ -1850,7 +1828,6 @@
               <a:rPr lang="ru-RU"/>
               <a:t>Третий уровень</a:t>
             </a:r>
-            <a:endParaRPr lang="ru-RU"/>
           </a:p>
           <a:p>
             <a:pPr lvl="3"/>
@@ -1858,7 +1835,6 @@
               <a:rPr lang="ru-RU"/>
               <a:t>Четвертый уровень</a:t>
             </a:r>
-            <a:endParaRPr lang="ru-RU"/>
           </a:p>
           <a:p>
             <a:pPr lvl="4"/>
@@ -1866,7 +1842,6 @@
               <a:rPr lang="ru-RU"/>
               <a:t>Пятый уровень</a:t>
             </a:r>
-            <a:endParaRPr lang="ru-RU"/>
           </a:p>
         </p:txBody>
       </p:sp>
@@ -1932,7 +1907,6 @@
               <a:rPr lang="ru-RU"/>
               <a:t>Образец текста</a:t>
             </a:r>
-            <a:endParaRPr lang="ru-RU"/>
           </a:p>
         </p:txBody>
       </p:sp>
@@ -1961,7 +1935,6 @@
               <a:rPr lang="ru-RU"/>
               <a:t>Образец текста</a:t>
             </a:r>
-            <a:endParaRPr lang="ru-RU"/>
           </a:p>
           <a:p>
             <a:pPr lvl="1"/>
@@ -1969,7 +1942,6 @@
               <a:rPr lang="ru-RU"/>
               <a:t>Второй уровень</a:t>
             </a:r>
-            <a:endParaRPr lang="ru-RU"/>
           </a:p>
           <a:p>
             <a:pPr lvl="2"/>
@@ -1977,7 +1949,6 @@
               <a:rPr lang="ru-RU"/>
               <a:t>Третий уровень</a:t>
             </a:r>
-            <a:endParaRPr lang="ru-RU"/>
           </a:p>
           <a:p>
             <a:pPr lvl="3"/>
@@ -1985,7 +1956,6 @@
               <a:rPr lang="ru-RU"/>
               <a:t>Четвертый уровень</a:t>
             </a:r>
-            <a:endParaRPr lang="ru-RU"/>
           </a:p>
           <a:p>
             <a:pPr lvl="4"/>
@@ -1993,7 +1963,6 @@
               <a:rPr lang="ru-RU"/>
               <a:t>Пятый уровень</a:t>
             </a:r>
-            <a:endParaRPr lang="ru-RU"/>
           </a:p>
         </p:txBody>
       </p:sp>
@@ -2014,6 +1983,7 @@
           <a:p>
             <a:fld id="{6731BE5E-5333-4BD4-98F4-AC5F1DC5955D}" type="datetimeFigureOut">
               <a:rPr lang="ru-RU" smtClean="0"/>
+              <a:t>20.05.2026</a:t>
             </a:fld>
             <a:endParaRPr lang="ru-RU"/>
           </a:p>
@@ -2055,6 +2025,7 @@
           <a:p>
             <a:fld id="{1DA346F6-9D0E-46BC-851D-41D1A5CE4D70}" type="slidenum">
               <a:rPr lang="ru-RU" smtClean="0"/>
+              <a:t>‹#›</a:t>
             </a:fld>
             <a:endParaRPr lang="ru-RU"/>
           </a:p>
@@ -2104,7 +2075,6 @@
               <a:rPr lang="ru-RU"/>
               <a:t>Образец заголовка</a:t>
             </a:r>
-            <a:endParaRPr lang="ru-RU"/>
           </a:p>
         </p:txBody>
       </p:sp>
@@ -2125,6 +2095,7 @@
           <a:p>
             <a:fld id="{6731BE5E-5333-4BD4-98F4-AC5F1DC5955D}" type="datetimeFigureOut">
               <a:rPr lang="ru-RU" smtClean="0"/>
+              <a:t>20.05.2026</a:t>
             </a:fld>
             <a:endParaRPr lang="ru-RU"/>
           </a:p>
@@ -2166,6 +2137,7 @@
           <a:p>
             <a:fld id="{1DA346F6-9D0E-46BC-851D-41D1A5CE4D70}" type="slidenum">
               <a:rPr lang="ru-RU" smtClean="0"/>
+              <a:t>‹#›</a:t>
             </a:fld>
             <a:endParaRPr lang="ru-RU"/>
           </a:p>
@@ -2213,6 +2185,7 @@
           <a:p>
             <a:fld id="{6731BE5E-5333-4BD4-98F4-AC5F1DC5955D}" type="datetimeFigureOut">
               <a:rPr lang="ru-RU" smtClean="0"/>
+              <a:t>20.05.2026</a:t>
             </a:fld>
             <a:endParaRPr lang="ru-RU"/>
           </a:p>
@@ -2254,6 +2227,7 @@
           <a:p>
             <a:fld id="{1DA346F6-9D0E-46BC-851D-41D1A5CE4D70}" type="slidenum">
               <a:rPr lang="ru-RU" smtClean="0"/>
+              <a:t>‹#›</a:t>
             </a:fld>
             <a:endParaRPr lang="ru-RU"/>
           </a:p>
@@ -2312,7 +2286,6 @@
               <a:rPr lang="ru-RU"/>
               <a:t>Образец заголовка</a:t>
             </a:r>
-            <a:endParaRPr lang="ru-RU"/>
           </a:p>
         </p:txBody>
       </p:sp>
@@ -2369,7 +2342,6 @@
               <a:rPr lang="ru-RU"/>
               <a:t>Образец текста</a:t>
             </a:r>
-            <a:endParaRPr lang="ru-RU"/>
           </a:p>
           <a:p>
             <a:pPr lvl="1"/>
@@ -2377,7 +2349,6 @@
               <a:rPr lang="ru-RU"/>
               <a:t>Второй уровень</a:t>
             </a:r>
-            <a:endParaRPr lang="ru-RU"/>
           </a:p>
           <a:p>
             <a:pPr lvl="2"/>
@@ -2385,7 +2356,6 @@
               <a:rPr lang="ru-RU"/>
               <a:t>Третий уровень</a:t>
             </a:r>
-            <a:endParaRPr lang="ru-RU"/>
           </a:p>
           <a:p>
             <a:pPr lvl="3"/>
@@ -2393,7 +2363,6 @@
               <a:rPr lang="ru-RU"/>
               <a:t>Четвертый уровень</a:t>
             </a:r>
-            <a:endParaRPr lang="ru-RU"/>
           </a:p>
           <a:p>
             <a:pPr lvl="4"/>
@@ -2401,7 +2370,6 @@
               <a:rPr lang="ru-RU"/>
               <a:t>Пятый уровень</a:t>
             </a:r>
-            <a:endParaRPr lang="ru-RU"/>
           </a:p>
         </p:txBody>
       </p:sp>
@@ -2467,7 +2435,6 @@
               <a:rPr lang="ru-RU"/>
               <a:t>Образец текста</a:t>
             </a:r>
-            <a:endParaRPr lang="ru-RU"/>
           </a:p>
         </p:txBody>
       </p:sp>
@@ -2488,6 +2455,7 @@
           <a:p>
             <a:fld id="{6731BE5E-5333-4BD4-98F4-AC5F1DC5955D}" type="datetimeFigureOut">
               <a:rPr lang="ru-RU" smtClean="0"/>
+              <a:t>20.05.2026</a:t>
             </a:fld>
             <a:endParaRPr lang="ru-RU"/>
           </a:p>
@@ -2529,6 +2497,7 @@
           <a:p>
             <a:fld id="{1DA346F6-9D0E-46BC-851D-41D1A5CE4D70}" type="slidenum">
               <a:rPr lang="ru-RU" smtClean="0"/>
+              <a:t>‹#›</a:t>
             </a:fld>
             <a:endParaRPr lang="ru-RU"/>
           </a:p>
@@ -2587,7 +2556,6 @@
               <a:rPr lang="ru-RU"/>
               <a:t>Образец заголовка</a:t>
             </a:r>
-            <a:endParaRPr lang="ru-RU"/>
           </a:p>
         </p:txBody>
       </p:sp>
@@ -2714,7 +2682,6 @@
               <a:rPr lang="ru-RU"/>
               <a:t>Образец текста</a:t>
             </a:r>
-            <a:endParaRPr lang="ru-RU"/>
           </a:p>
         </p:txBody>
       </p:sp>
@@ -2735,6 +2702,7 @@
           <a:p>
             <a:fld id="{6731BE5E-5333-4BD4-98F4-AC5F1DC5955D}" type="datetimeFigureOut">
               <a:rPr lang="ru-RU" smtClean="0"/>
+              <a:t>20.05.2026</a:t>
             </a:fld>
             <a:endParaRPr lang="ru-RU"/>
           </a:p>
@@ -2776,6 +2744,7 @@
           <a:p>
             <a:fld id="{1DA346F6-9D0E-46BC-851D-41D1A5CE4D70}" type="slidenum">
               <a:rPr lang="ru-RU" smtClean="0"/>
+              <a:t>‹#›</a:t>
             </a:fld>
             <a:endParaRPr lang="ru-RU"/>
           </a:p>
@@ -2795,7 +2764,7 @@
     <p:bg>
       <p:bgPr>
         <a:blipFill dpi="0" rotWithShape="1">
-          <a:blip r:embed="rId12">
+          <a:blip r:embed="rId13">
             <a:lum/>
           </a:blip>
           <a:srcRect/>
@@ -2847,7 +2816,6 @@
               <a:rPr lang="ru-RU"/>
               <a:t>Образец заголовка</a:t>
             </a:r>
-            <a:endParaRPr lang="ru-RU"/>
           </a:p>
         </p:txBody>
       </p:sp>
@@ -2881,7 +2849,6 @@
               <a:rPr lang="ru-RU"/>
               <a:t>Образец текста</a:t>
             </a:r>
-            <a:endParaRPr lang="ru-RU"/>
           </a:p>
           <a:p>
             <a:pPr lvl="1"/>
@@ -2889,7 +2856,6 @@
               <a:rPr lang="ru-RU"/>
               <a:t>Второй уровень</a:t>
             </a:r>
-            <a:endParaRPr lang="ru-RU"/>
           </a:p>
           <a:p>
             <a:pPr lvl="2"/>
@@ -2897,7 +2863,6 @@
               <a:rPr lang="ru-RU"/>
               <a:t>Третий уровень</a:t>
             </a:r>
-            <a:endParaRPr lang="ru-RU"/>
           </a:p>
           <a:p>
             <a:pPr lvl="3"/>
@@ -2905,7 +2870,6 @@
               <a:rPr lang="ru-RU"/>
               <a:t>Четвертый уровень</a:t>
             </a:r>
-            <a:endParaRPr lang="ru-RU"/>
           </a:p>
           <a:p>
             <a:pPr lvl="4"/>
@@ -2913,7 +2877,6 @@
               <a:rPr lang="ru-RU"/>
               <a:t>Пятый уровень</a:t>
             </a:r>
-            <a:endParaRPr lang="ru-RU"/>
           </a:p>
         </p:txBody>
       </p:sp>
@@ -2952,6 +2915,7 @@
           <a:p>
             <a:fld id="{6731BE5E-5333-4BD4-98F4-AC5F1DC5955D}" type="datetimeFigureOut">
               <a:rPr lang="ru-RU" smtClean="0"/>
+              <a:t>20.05.2026</a:t>
             </a:fld>
             <a:endParaRPr lang="ru-RU"/>
           </a:p>
@@ -3029,6 +2993,7 @@
           <a:p>
             <a:fld id="{1DA346F6-9D0E-46BC-851D-41D1A5CE4D70}" type="slidenum">
               <a:rPr lang="ru-RU" smtClean="0"/>
+              <a:t>‹#›</a:t>
             </a:fld>
             <a:endParaRPr lang="ru-RU"/>
           </a:p>
@@ -3339,7 +3304,7 @@
     <p:bg>
       <p:bgPr>
         <a:blipFill dpi="0" rotWithShape="1">
-          <a:blip r:embed="rId1">
+          <a:blip r:embed="rId3">
             <a:lum/>
           </a:blip>
           <a:srcRect/>
@@ -3398,14 +3363,6 @@
               </a:rPr>
               <a:t>Платформер</a:t>
             </a:r>
-            <a:endParaRPr lang="ru-RU" sz="4000" b="1" dirty="0">
-              <a:solidFill>
-                <a:schemeClr val="tx2">
-                  <a:lumMod val="75000"/>
-                </a:schemeClr>
-              </a:solidFill>
-              <a:latin typeface="Montserrat SemiBold" pitchFamily="2" charset="-52"/>
-            </a:endParaRPr>
           </a:p>
         </p:txBody>
       </p:sp>
@@ -3442,14 +3399,6 @@
               </a:rPr>
               <a:t>2026 год</a:t>
             </a:r>
-            <a:endParaRPr lang="ru-RU" dirty="0">
-              <a:solidFill>
-                <a:schemeClr val="tx2">
-                  <a:lumMod val="75000"/>
-                </a:schemeClr>
-              </a:solidFill>
-              <a:latin typeface="Montserrat Medium" pitchFamily="2" charset="-52"/>
-            </a:endParaRPr>
           </a:p>
         </p:txBody>
       </p:sp>
@@ -3511,7 +3460,7 @@
     <p:bg>
       <p:bgPr>
         <a:blipFill dpi="0" rotWithShape="1">
-          <a:blip r:embed="rId1">
+          <a:blip r:embed="rId2">
             <a:lum/>
           </a:blip>
           <a:srcRect/>
@@ -3544,8 +3493,8 @@
         </p:nvSpPr>
         <p:spPr>
           <a:xfrm>
-            <a:off x="1482436" y="548986"/>
-            <a:ext cx="10514417" cy="1323439"/>
+            <a:off x="5130799" y="256598"/>
+            <a:ext cx="6873998" cy="584775"/>
           </a:xfrm>
           <a:prstGeom prst="rect">
             <a:avLst/>
@@ -3559,7 +3508,44 @@
           <a:lstStyle/>
           <a:p>
             <a:r>
-              <a:rPr lang="ru-RU" sz="2000" dirty="0">
+              <a:rPr lang="ru-RU" sz="3200" dirty="0">
+                <a:solidFill>
+                  <a:schemeClr val="tx2">
+                    <a:lumMod val="50000"/>
+                  </a:schemeClr>
+                </a:solidFill>
+                <a:latin typeface="Montserrat ExtraBold" pitchFamily="2" charset="-52"/>
+              </a:rPr>
+              <a:t>Актуальность и суть проекта</a:t>
+            </a:r>
+          </a:p>
+        </p:txBody>
+      </p:sp>
+      <p:sp>
+        <p:nvSpPr>
+          <p:cNvPr id="5" name="TextBox 4"/>
+          <p:cNvSpPr txBox="1"/>
+          <p:nvPr/>
+        </p:nvSpPr>
+        <p:spPr>
+          <a:xfrm>
+            <a:off x="320059" y="2054877"/>
+            <a:ext cx="11210290" cy="2245360"/>
+          </a:xfrm>
+          <a:prstGeom prst="rect">
+            <a:avLst/>
+          </a:prstGeom>
+          <a:noFill/>
+        </p:spPr>
+        <p:txBody>
+          <a:bodyPr wrap="none" rtlCol="0">
+            <a:spAutoFit/>
+          </a:bodyPr>
+          <a:lstStyle/>
+          <a:p>
+            <a:pPr algn="l"/>
+            <a:r>
+              <a:rPr lang="ru-RU" sz="2000" b="1" dirty="0">
                 <a:solidFill>
                   <a:schemeClr val="tx2">
                     <a:lumMod val="50000"/>
@@ -3567,9 +3553,48 @@
                 </a:solidFill>
                 <a:latin typeface="Montserrat" pitchFamily="2" charset="-52"/>
               </a:rPr>
-              <a:t>Для оформления твоей презентации мы предлагаем тебе два вида слайдов:</a:t>
-            </a:r>
-            <a:endParaRPr lang="ru-RU" sz="2000" dirty="0">
+              <a:t>Какую проблему решает ваш проект? </a:t>
+            </a:r>
+          </a:p>
+          <a:p>
+            <a:pPr marL="342900" indent="-342900" algn="l">
+              <a:buFont typeface="Arial" panose="020B0604020202020204" pitchFamily="34" charset="0"/>
+              <a:buChar char="•"/>
+            </a:pPr>
+            <a:r>
+              <a:rPr lang="en-US" altLang="en-US" sz="2000" dirty="0">
+                <a:solidFill>
+                  <a:schemeClr val="tx2">
+                    <a:lumMod val="50000"/>
+                  </a:schemeClr>
+                </a:solidFill>
+                <a:latin typeface="Montserrat" pitchFamily="2" charset="-52"/>
+              </a:rPr>
+              <a:t>Жанр 2</a:t>
+            </a:r>
+            <a:r>
+              <a:rPr lang="en-US" altLang="ru-RU" sz="2000" dirty="0">
+                <a:solidFill>
+                  <a:schemeClr val="tx2">
+                    <a:lumMod val="50000"/>
+                  </a:schemeClr>
+                </a:solidFill>
+                <a:latin typeface="Montserrat" pitchFamily="2" charset="-52"/>
+              </a:rPr>
+              <a:t>D-</a:t>
+            </a:r>
+            <a:r>
+              <a:rPr lang="en-US" altLang="en-US" sz="2000" dirty="0">
+                <a:solidFill>
+                  <a:schemeClr val="tx2">
+                    <a:lumMod val="50000"/>
+                  </a:schemeClr>
+                </a:solidFill>
+                <a:latin typeface="Montserrat" pitchFamily="2" charset="-52"/>
+              </a:rPr>
+              <a:t>платформеров переживает «золотой век» в инди-индустрии.</a:t>
+            </a:r>
+            <a:endParaRPr lang="en-US" altLang="ru-RU" sz="2000" dirty="0">
               <a:solidFill>
                 <a:schemeClr val="tx2">
                   <a:lumMod val="50000"/>
@@ -3579,12 +3604,12 @@
             </a:endParaRPr>
           </a:p>
           <a:p>
-            <a:pPr marL="285750" indent="-285750">
-              <a:buFontTx/>
-              <a:buChar char="-"/>
+            <a:pPr marL="342900" indent="-342900" algn="l">
+              <a:buFont typeface="Arial" panose="020B0604020202020204" pitchFamily="34" charset="0"/>
+              <a:buChar char="•"/>
             </a:pPr>
             <a:r>
-              <a:rPr lang="ru-RU" sz="2000" dirty="0">
+              <a:rPr lang="en-US" altLang="en-US" sz="2000" dirty="0">
                 <a:solidFill>
                   <a:schemeClr val="tx2">
                     <a:lumMod val="50000"/>
@@ -3592,9 +3617,76 @@
                 </a:solidFill>
                 <a:latin typeface="Montserrat" pitchFamily="2" charset="-52"/>
               </a:rPr>
-              <a:t>с оленем</a:t>
-            </a:r>
-            <a:endParaRPr lang="ru-RU" sz="2000" dirty="0">
+              <a:t>Игроки ищут уникальные сочетания механик и высокую сложность.</a:t>
+            </a:r>
+          </a:p>
+          <a:p>
+            <a:pPr algn="l"/>
+            <a:r>
+              <a:rPr lang="ru-RU" sz="2000" b="1" dirty="0">
+                <a:solidFill>
+                  <a:schemeClr val="tx2">
+                    <a:lumMod val="50000"/>
+                  </a:schemeClr>
+                </a:solidFill>
+                <a:latin typeface="Montserrat" pitchFamily="2" charset="-52"/>
+              </a:rPr>
+              <a:t>Какова его степень важности в данный момент?</a:t>
+            </a:r>
+          </a:p>
+          <a:p>
+            <a:pPr marL="342900" indent="-342900" algn="l">
+              <a:buFont typeface="Arial" panose="020B0604020202020204" pitchFamily="34" charset="0"/>
+              <a:buChar char="•"/>
+            </a:pPr>
+            <a:r>
+              <a:rPr lang="en-US" altLang="en-US" sz="2000" dirty="0">
+                <a:solidFill>
+                  <a:schemeClr val="tx2">
+                    <a:lumMod val="50000"/>
+                  </a:schemeClr>
+                </a:solidFill>
+                <a:latin typeface="Montserrat" pitchFamily="2" charset="-52"/>
+              </a:rPr>
+              <a:t>Проект развивает навыки геймдизайна и программирования на </a:t>
+            </a:r>
+            <a:r>
+              <a:rPr lang="en-US" altLang="ru-RU" sz="2000" dirty="0">
+                <a:solidFill>
+                  <a:schemeClr val="tx2">
+                    <a:lumMod val="50000"/>
+                  </a:schemeClr>
+                </a:solidFill>
+                <a:latin typeface="Montserrat" pitchFamily="2" charset="-52"/>
+              </a:rPr>
+              <a:t>C# </a:t>
+            </a:r>
+            <a:r>
+              <a:rPr lang="en-US" altLang="en-US" sz="2000" dirty="0">
+                <a:solidFill>
+                  <a:schemeClr val="tx2">
+                    <a:lumMod val="50000"/>
+                  </a:schemeClr>
+                </a:solidFill>
+                <a:latin typeface="Montserrat" pitchFamily="2" charset="-52"/>
+              </a:rPr>
+              <a:t>в среде </a:t>
+            </a:r>
+            <a:r>
+              <a:rPr lang="en-US" altLang="ru-RU" sz="2000" dirty="0">
+                <a:solidFill>
+                  <a:schemeClr val="tx2">
+                    <a:lumMod val="50000"/>
+                  </a:schemeClr>
+                </a:solidFill>
+                <a:latin typeface="Montserrat" pitchFamily="2" charset="-52"/>
+              </a:rPr>
+              <a:t>Unity.</a:t>
+            </a:r>
+          </a:p>
+          <a:p>
+            <a:pPr algn="l"/>
+            <a:endParaRPr lang="ru-RU" sz="2000" b="1" dirty="0">
               <a:solidFill>
                 <a:schemeClr val="tx2">
                   <a:lumMod val="50000"/>
@@ -3604,22 +3696,8 @@
             </a:endParaRPr>
           </a:p>
           <a:p>
-            <a:pPr marL="285750" indent="-285750">
-              <a:buFontTx/>
-              <a:buChar char="-"/>
-            </a:pPr>
-            <a:r>
-              <a:rPr lang="ru-RU" sz="2000" dirty="0">
-                <a:solidFill>
-                  <a:schemeClr val="tx2">
-                    <a:lumMod val="50000"/>
-                  </a:schemeClr>
-                </a:solidFill>
-                <a:latin typeface="Montserrat" pitchFamily="2" charset="-52"/>
-              </a:rPr>
-              <a:t>без оленя</a:t>
-            </a:r>
-            <a:endParaRPr lang="ru-RU" sz="2000" dirty="0">
+            <a:pPr algn="l"/>
+            <a:endParaRPr lang="ru-RU" sz="2000" b="1" dirty="0">
               <a:solidFill>
                 <a:schemeClr val="tx2">
                   <a:lumMod val="50000"/>
@@ -3627,275 +3705,6 @@
               </a:solidFill>
               <a:latin typeface="Montserrat" pitchFamily="2" charset="-52"/>
             </a:endParaRPr>
-          </a:p>
-          <a:p>
-            <a:r>
-              <a:rPr lang="ru-RU" sz="2000" dirty="0">
-                <a:solidFill>
-                  <a:schemeClr val="tx2">
-                    <a:lumMod val="50000"/>
-                  </a:schemeClr>
-                </a:solidFill>
-                <a:latin typeface="Montserrat" pitchFamily="2" charset="-52"/>
-              </a:rPr>
-              <a:t>Тебе нужно просто скопировать эти слайды в нужном количестве! </a:t>
-            </a:r>
-            <a:r>
-              <a:rPr lang="ru-RU" sz="2000" dirty="0">
-                <a:solidFill>
-                  <a:schemeClr val="tx2">
-                    <a:lumMod val="50000"/>
-                  </a:schemeClr>
-                </a:solidFill>
-                <a:latin typeface="Montserrat" pitchFamily="2" charset="-52"/>
-                <a:sym typeface="Wingdings" panose="05000000000000000000" pitchFamily="2" charset="2"/>
-              </a:rPr>
-              <a:t></a:t>
-            </a:r>
-            <a:endParaRPr lang="ru-RU" sz="2000" dirty="0">
-              <a:solidFill>
-                <a:schemeClr val="tx2">
-                  <a:lumMod val="50000"/>
-                </a:schemeClr>
-              </a:solidFill>
-              <a:latin typeface="Montserrat" pitchFamily="2" charset="-52"/>
-            </a:endParaRPr>
-          </a:p>
-        </p:txBody>
-      </p:sp>
-      <p:sp>
-        <p:nvSpPr>
-          <p:cNvPr id="5" name="TextBox 4"/>
-          <p:cNvSpPr txBox="1"/>
-          <p:nvPr/>
-        </p:nvSpPr>
-        <p:spPr>
-          <a:xfrm>
-            <a:off x="300181" y="3754469"/>
-            <a:ext cx="7584127" cy="2554545"/>
-          </a:xfrm>
-          <a:prstGeom prst="rect">
-            <a:avLst/>
-          </a:prstGeom>
-          <a:noFill/>
-        </p:spPr>
-        <p:txBody>
-          <a:bodyPr wrap="none" rtlCol="0">
-            <a:spAutoFit/>
-          </a:bodyPr>
-          <a:lstStyle/>
-          <a:p>
-            <a:r>
-              <a:rPr lang="ru-RU" sz="2000" dirty="0">
-                <a:solidFill>
-                  <a:schemeClr val="tx2">
-                    <a:lumMod val="75000"/>
-                  </a:schemeClr>
-                </a:solidFill>
-                <a:latin typeface="Montserrat" pitchFamily="2" charset="-52"/>
-              </a:rPr>
-              <a:t>Обрати внимание, что цвет надписей – сизый </a:t>
-            </a:r>
-            <a:endParaRPr lang="ru-RU" sz="2000" dirty="0">
-              <a:solidFill>
-                <a:schemeClr val="tx2">
-                  <a:lumMod val="75000"/>
-                </a:schemeClr>
-              </a:solidFill>
-              <a:latin typeface="Montserrat" pitchFamily="2" charset="-52"/>
-            </a:endParaRPr>
-          </a:p>
-          <a:p>
-            <a:r>
-              <a:rPr lang="ru-RU" sz="2000" dirty="0">
-                <a:solidFill>
-                  <a:schemeClr val="tx2">
-                    <a:lumMod val="75000"/>
-                  </a:schemeClr>
-                </a:solidFill>
-                <a:latin typeface="Montserrat" pitchFamily="2" charset="-52"/>
-              </a:rPr>
-              <a:t>(сизый, текст 2, более тёмный оттенок 50%). </a:t>
-            </a:r>
-            <a:endParaRPr lang="ru-RU" sz="2000" dirty="0">
-              <a:solidFill>
-                <a:schemeClr val="tx2">
-                  <a:lumMod val="75000"/>
-                </a:schemeClr>
-              </a:solidFill>
-              <a:latin typeface="Montserrat" pitchFamily="2" charset="-52"/>
-            </a:endParaRPr>
-          </a:p>
-          <a:p>
-            <a:r>
-              <a:rPr lang="ru-RU" sz="2000" dirty="0">
-                <a:solidFill>
-                  <a:schemeClr val="tx2">
-                    <a:lumMod val="75000"/>
-                  </a:schemeClr>
-                </a:solidFill>
-                <a:latin typeface="Montserrat" pitchFamily="2" charset="-52"/>
-              </a:rPr>
-              <a:t>Пожалуйста, не используй чёрный.</a:t>
-            </a:r>
-            <a:endParaRPr lang="ru-RU" sz="2000" dirty="0">
-              <a:solidFill>
-                <a:schemeClr val="tx2">
-                  <a:lumMod val="75000"/>
-                </a:schemeClr>
-              </a:solidFill>
-              <a:latin typeface="Montserrat" pitchFamily="2" charset="-52"/>
-            </a:endParaRPr>
-          </a:p>
-          <a:p>
-            <a:r>
-              <a:rPr lang="ru-RU" sz="2000" dirty="0">
-                <a:solidFill>
-                  <a:schemeClr val="tx2">
-                    <a:lumMod val="75000"/>
-                  </a:schemeClr>
-                </a:solidFill>
-                <a:latin typeface="Montserrat" pitchFamily="2" charset="-52"/>
-              </a:rPr>
-              <a:t>Если имеется необходимость добавить ещё один цвет:</a:t>
-            </a:r>
-            <a:endParaRPr lang="ru-RU" sz="2000" dirty="0">
-              <a:solidFill>
-                <a:schemeClr val="tx2">
-                  <a:lumMod val="75000"/>
-                </a:schemeClr>
-              </a:solidFill>
-              <a:latin typeface="Montserrat" pitchFamily="2" charset="-52"/>
-            </a:endParaRPr>
-          </a:p>
-          <a:p>
-            <a:pPr marL="285750" indent="-285750">
-              <a:buFontTx/>
-              <a:buChar char="-"/>
-            </a:pPr>
-            <a:r>
-              <a:rPr lang="ru-RU" sz="2000" dirty="0">
-                <a:solidFill>
-                  <a:schemeClr val="tx2">
-                    <a:lumMod val="75000"/>
-                  </a:schemeClr>
-                </a:solidFill>
-                <a:latin typeface="Montserrat" pitchFamily="2" charset="-52"/>
-              </a:rPr>
-              <a:t>подумай, нужно ли тебе это</a:t>
-            </a:r>
-            <a:endParaRPr lang="ru-RU" sz="2000" dirty="0">
-              <a:solidFill>
-                <a:schemeClr val="tx2">
-                  <a:lumMod val="75000"/>
-                </a:schemeClr>
-              </a:solidFill>
-              <a:latin typeface="Montserrat" pitchFamily="2" charset="-52"/>
-            </a:endParaRPr>
-          </a:p>
-          <a:p>
-            <a:pPr marL="285750" indent="-285750">
-              <a:buFontTx/>
-              <a:buChar char="-"/>
-            </a:pPr>
-            <a:r>
-              <a:rPr lang="ru-RU" sz="2000" dirty="0">
-                <a:solidFill>
-                  <a:schemeClr val="tx2">
-                    <a:lumMod val="75000"/>
-                  </a:schemeClr>
-                </a:solidFill>
-                <a:latin typeface="Montserrat" pitchFamily="2" charset="-52"/>
-              </a:rPr>
-              <a:t>посоветуйся с наставником</a:t>
-            </a:r>
-            <a:endParaRPr lang="ru-RU" sz="2000" dirty="0">
-              <a:solidFill>
-                <a:schemeClr val="tx2">
-                  <a:lumMod val="75000"/>
-                </a:schemeClr>
-              </a:solidFill>
-              <a:latin typeface="Montserrat" pitchFamily="2" charset="-52"/>
-            </a:endParaRPr>
-          </a:p>
-          <a:p>
-            <a:pPr marL="285750" indent="-285750">
-              <a:buFontTx/>
-              <a:buChar char="-"/>
-            </a:pPr>
-            <a:r>
-              <a:rPr lang="ru-RU" sz="2000" dirty="0">
-                <a:solidFill>
-                  <a:schemeClr val="tx2">
-                    <a:lumMod val="75000"/>
-                  </a:schemeClr>
-                </a:solidFill>
-                <a:latin typeface="Montserrat" pitchFamily="2" charset="-52"/>
-              </a:rPr>
-              <a:t>вернись к первому пункту</a:t>
-            </a:r>
-            <a:endParaRPr lang="ru-RU" sz="2000" dirty="0">
-              <a:solidFill>
-                <a:schemeClr val="tx2">
-                  <a:lumMod val="75000"/>
-                </a:schemeClr>
-              </a:solidFill>
-              <a:latin typeface="Montserrat" pitchFamily="2" charset="-52"/>
-            </a:endParaRPr>
-          </a:p>
-          <a:p>
-            <a:pPr marL="285750" indent="-285750">
-              <a:buFontTx/>
-              <a:buChar char="-"/>
-            </a:pPr>
-            <a:r>
-              <a:rPr lang="ru-RU" sz="2000" dirty="0">
-                <a:solidFill>
-                  <a:schemeClr val="tx2">
-                    <a:lumMod val="75000"/>
-                  </a:schemeClr>
-                </a:solidFill>
-                <a:latin typeface="Montserrat" pitchFamily="2" charset="-52"/>
-              </a:rPr>
-              <a:t>в крайнем случае используй белый!</a:t>
-            </a:r>
-            <a:endParaRPr lang="ru-RU" sz="2000" dirty="0">
-              <a:solidFill>
-                <a:schemeClr val="tx2">
-                  <a:lumMod val="75000"/>
-                </a:schemeClr>
-              </a:solidFill>
-              <a:latin typeface="Montserrat" pitchFamily="2" charset="-52"/>
-            </a:endParaRPr>
-          </a:p>
-        </p:txBody>
-      </p:sp>
-      <p:sp>
-        <p:nvSpPr>
-          <p:cNvPr id="2" name="Текстовое поле 1"/>
-          <p:cNvSpPr txBox="1"/>
-          <p:nvPr/>
-        </p:nvSpPr>
-        <p:spPr>
-          <a:xfrm>
-            <a:off x="4605020" y="2163445"/>
-            <a:ext cx="4064000" cy="1106805"/>
-          </a:xfrm>
-          <a:prstGeom prst="rect">
-            <a:avLst/>
-          </a:prstGeom>
-          <a:noFill/>
-        </p:spPr>
-        <p:txBody>
-          <a:bodyPr wrap="square" rtlCol="0">
-            <a:spAutoFit/>
-          </a:bodyPr>
-          <a:p>
-            <a:r>
-              <a:rPr lang="ru-RU" altLang="en-US" sz="6600"/>
-              <a:t>УДАЛИТЬ</a:t>
-            </a:r>
-            <a:endParaRPr lang="ru-RU" altLang="en-US" sz="6600"/>
           </a:p>
         </p:txBody>
       </p:sp>
@@ -3910,398 +3719,10 @@
 <file path=ppt/slides/slide3.xml><?xml version="1.0" encoding="utf-8"?>
 <p:sld xmlns:a="http://schemas.openxmlformats.org/drawingml/2006/main" xmlns:r="http://schemas.openxmlformats.org/officeDocument/2006/relationships" xmlns:p="http://schemas.openxmlformats.org/presentationml/2006/main">
   <p:cSld>
-    <p:spTree>
-      <p:nvGrpSpPr>
-        <p:cNvPr id="1" name=""/>
-        <p:cNvGrpSpPr/>
-        <p:nvPr/>
-      </p:nvGrpSpPr>
-      <p:grpSpPr>
-        <a:xfrm>
-          <a:off x="0" y="0"/>
-          <a:ext cx="0" cy="0"/>
-          <a:chOff x="0" y="0"/>
-          <a:chExt cx="0" cy="0"/>
-        </a:xfrm>
-      </p:grpSpPr>
-      <p:sp>
-        <p:nvSpPr>
-          <p:cNvPr id="5" name="TextBox 4"/>
-          <p:cNvSpPr txBox="1"/>
-          <p:nvPr/>
-        </p:nvSpPr>
-        <p:spPr>
-          <a:xfrm>
-            <a:off x="2272144" y="554181"/>
-            <a:ext cx="9695283" cy="3477875"/>
-          </a:xfrm>
-          <a:prstGeom prst="rect">
-            <a:avLst/>
-          </a:prstGeom>
-          <a:noFill/>
-        </p:spPr>
-        <p:txBody>
-          <a:bodyPr wrap="none" rtlCol="0">
-            <a:spAutoFit/>
-          </a:bodyPr>
-          <a:lstStyle/>
-          <a:p>
-            <a:r>
-              <a:rPr lang="en-US" sz="2000" b="1" dirty="0">
-                <a:solidFill>
-                  <a:schemeClr val="tx2">
-                    <a:lumMod val="50000"/>
-                  </a:schemeClr>
-                </a:solidFill>
-                <a:latin typeface="Montserrat" pitchFamily="2" charset="-52"/>
-              </a:rPr>
-              <a:t>Montserrat</a:t>
-            </a:r>
-            <a:r>
-              <a:rPr lang="ru-RU" sz="2000" dirty="0">
-                <a:solidFill>
-                  <a:schemeClr val="tx2">
-                    <a:lumMod val="50000"/>
-                  </a:schemeClr>
-                </a:solidFill>
-                <a:latin typeface="Montserrat" pitchFamily="2" charset="-52"/>
-              </a:rPr>
-              <a:t> – это название семейства шрифтов, который используется</a:t>
-            </a:r>
-            <a:endParaRPr lang="ru-RU" sz="2000" dirty="0">
-              <a:solidFill>
-                <a:schemeClr val="tx2">
-                  <a:lumMod val="50000"/>
-                </a:schemeClr>
-              </a:solidFill>
-              <a:latin typeface="Montserrat" pitchFamily="2" charset="-52"/>
-            </a:endParaRPr>
-          </a:p>
-          <a:p>
-            <a:r>
-              <a:rPr lang="ru-RU" sz="2000" dirty="0">
-                <a:solidFill>
-                  <a:schemeClr val="tx2">
-                    <a:lumMod val="50000"/>
-                  </a:schemeClr>
-                </a:solidFill>
-                <a:latin typeface="Montserrat" pitchFamily="2" charset="-52"/>
-              </a:rPr>
-              <a:t>в данной презентации.</a:t>
-            </a:r>
-            <a:endParaRPr lang="ru-RU" sz="2000" dirty="0">
-              <a:solidFill>
-                <a:schemeClr val="tx2">
-                  <a:lumMod val="50000"/>
-                </a:schemeClr>
-              </a:solidFill>
-              <a:latin typeface="Montserrat" pitchFamily="2" charset="-52"/>
-            </a:endParaRPr>
-          </a:p>
-          <a:p>
-            <a:r>
-              <a:rPr lang="ru-RU" sz="2000" dirty="0">
-                <a:solidFill>
-                  <a:schemeClr val="tx2">
-                    <a:lumMod val="50000"/>
-                  </a:schemeClr>
-                </a:solidFill>
-                <a:latin typeface="Montserrat" pitchFamily="2" charset="-52"/>
-              </a:rPr>
-              <a:t>Скачай и установи его, если до сих пор этого не сделал.</a:t>
-            </a:r>
-            <a:endParaRPr lang="ru-RU" sz="2000" dirty="0">
-              <a:solidFill>
-                <a:schemeClr val="tx2">
-                  <a:lumMod val="50000"/>
-                </a:schemeClr>
-              </a:solidFill>
-              <a:latin typeface="Montserrat" pitchFamily="2" charset="-52"/>
-            </a:endParaRPr>
-          </a:p>
-          <a:p>
-            <a:endParaRPr lang="ru-RU" sz="2000" dirty="0">
-              <a:solidFill>
-                <a:schemeClr val="tx2">
-                  <a:lumMod val="50000"/>
-                </a:schemeClr>
-              </a:solidFill>
-              <a:latin typeface="Montserrat" pitchFamily="2" charset="-52"/>
-            </a:endParaRPr>
-          </a:p>
-          <a:p>
-            <a:r>
-              <a:rPr lang="en-US" sz="2000" dirty="0">
-                <a:solidFill>
-                  <a:schemeClr val="tx2">
-                    <a:lumMod val="50000"/>
-                  </a:schemeClr>
-                </a:solidFill>
-                <a:latin typeface="Montserrat" pitchFamily="2" charset="-52"/>
-                <a:hlinkClick r:id="rId1"/>
-              </a:rPr>
-              <a:t>Montserrat - Google Fonts</a:t>
-            </a:r>
-            <a:endParaRPr lang="ru-RU" sz="2000" dirty="0">
-              <a:solidFill>
-                <a:schemeClr val="tx2">
-                  <a:lumMod val="50000"/>
-                </a:schemeClr>
-              </a:solidFill>
-              <a:latin typeface="Montserrat" pitchFamily="2" charset="-52"/>
-            </a:endParaRPr>
-          </a:p>
-          <a:p>
-            <a:endParaRPr lang="ru-RU" sz="2000" dirty="0">
-              <a:solidFill>
-                <a:schemeClr val="tx2">
-                  <a:lumMod val="50000"/>
-                </a:schemeClr>
-              </a:solidFill>
-              <a:latin typeface="Montserrat" pitchFamily="2" charset="-52"/>
-            </a:endParaRPr>
-          </a:p>
-          <a:p>
-            <a:r>
-              <a:rPr lang="ru-RU" sz="2000" dirty="0">
-                <a:solidFill>
-                  <a:schemeClr val="tx2">
-                    <a:lumMod val="50000"/>
-                  </a:schemeClr>
-                </a:solidFill>
-                <a:latin typeface="Montserrat" pitchFamily="2" charset="-52"/>
-              </a:rPr>
-              <a:t>Не бойся выделять акценты </a:t>
-            </a:r>
-            <a:r>
-              <a:rPr lang="ru-RU" sz="2000" b="1" dirty="0">
-                <a:solidFill>
-                  <a:schemeClr val="tx2">
-                    <a:lumMod val="50000"/>
-                  </a:schemeClr>
-                </a:solidFill>
-                <a:latin typeface="Montserrat" pitchFamily="2" charset="-52"/>
-              </a:rPr>
-              <a:t>жирным,</a:t>
-            </a:r>
-            <a:r>
-              <a:rPr lang="ru-RU" sz="2000" dirty="0">
-                <a:solidFill>
-                  <a:schemeClr val="tx2">
-                    <a:lumMod val="50000"/>
-                  </a:schemeClr>
-                </a:solidFill>
-                <a:latin typeface="Montserrat" pitchFamily="2" charset="-52"/>
-              </a:rPr>
-              <a:t> </a:t>
-            </a:r>
-            <a:r>
-              <a:rPr lang="ru-RU" sz="2000" i="1" dirty="0">
-                <a:solidFill>
-                  <a:schemeClr val="tx2">
-                    <a:lumMod val="50000"/>
-                  </a:schemeClr>
-                </a:solidFill>
-                <a:latin typeface="Montserrat" pitchFamily="2" charset="-52"/>
-              </a:rPr>
-              <a:t>использовать курсив </a:t>
-            </a:r>
-            <a:endParaRPr lang="ru-RU" sz="2000" i="1" dirty="0">
-              <a:solidFill>
-                <a:schemeClr val="tx2">
-                  <a:lumMod val="50000"/>
-                </a:schemeClr>
-              </a:solidFill>
-              <a:latin typeface="Montserrat" pitchFamily="2" charset="-52"/>
-            </a:endParaRPr>
-          </a:p>
-          <a:p>
-            <a:r>
-              <a:rPr lang="ru-RU" sz="2000" u="sng" dirty="0">
-                <a:solidFill>
-                  <a:schemeClr val="tx2">
-                    <a:lumMod val="50000"/>
-                  </a:schemeClr>
-                </a:solidFill>
-                <a:latin typeface="Montserrat" pitchFamily="2" charset="-52"/>
-              </a:rPr>
-              <a:t>и подчёркивать важную информацию!</a:t>
-            </a:r>
-            <a:endParaRPr lang="ru-RU" sz="2000" u="sng" dirty="0">
-              <a:solidFill>
-                <a:schemeClr val="tx2">
-                  <a:lumMod val="50000"/>
-                </a:schemeClr>
-              </a:solidFill>
-              <a:latin typeface="Montserrat" pitchFamily="2" charset="-52"/>
-            </a:endParaRPr>
-          </a:p>
-          <a:p>
-            <a:endParaRPr lang="ru-RU" sz="2000" u="sng" dirty="0">
-              <a:solidFill>
-                <a:schemeClr val="tx2">
-                  <a:lumMod val="50000"/>
-                </a:schemeClr>
-              </a:solidFill>
-              <a:latin typeface="Montserrat" pitchFamily="2" charset="-52"/>
-            </a:endParaRPr>
-          </a:p>
-          <a:p>
-            <a:r>
-              <a:rPr lang="ru-RU" sz="2000" dirty="0">
-                <a:solidFill>
-                  <a:schemeClr val="tx2">
-                    <a:lumMod val="50000"/>
-                  </a:schemeClr>
-                </a:solidFill>
-                <a:latin typeface="Montserrat" pitchFamily="2" charset="-52"/>
-              </a:rPr>
-              <a:t>Не забывай о том, что презентация – дополнение твоего выступления.</a:t>
-            </a:r>
-            <a:endParaRPr lang="ru-RU" sz="2000" dirty="0">
-              <a:solidFill>
-                <a:schemeClr val="tx2">
-                  <a:lumMod val="50000"/>
-                </a:schemeClr>
-              </a:solidFill>
-              <a:latin typeface="Montserrat" pitchFamily="2" charset="-52"/>
-            </a:endParaRPr>
-          </a:p>
-          <a:p>
-            <a:r>
-              <a:rPr lang="ru-RU" sz="2000" dirty="0">
-                <a:solidFill>
-                  <a:schemeClr val="tx2">
-                    <a:lumMod val="50000"/>
-                  </a:schemeClr>
-                </a:solidFill>
-                <a:latin typeface="Montserrat" pitchFamily="2" charset="-52"/>
-              </a:rPr>
-              <a:t>На ней </a:t>
-            </a:r>
-            <a:r>
-              <a:rPr lang="ru-RU" sz="2000" b="1" dirty="0">
-                <a:solidFill>
-                  <a:schemeClr val="tx2">
-                    <a:lumMod val="50000"/>
-                  </a:schemeClr>
-                </a:solidFill>
-                <a:latin typeface="Montserrat" pitchFamily="2" charset="-52"/>
-              </a:rPr>
-              <a:t>не должно быть много текста</a:t>
-            </a:r>
-            <a:r>
-              <a:rPr lang="ru-RU" sz="2000" dirty="0">
-                <a:solidFill>
-                  <a:schemeClr val="tx2">
-                    <a:lumMod val="50000"/>
-                  </a:schemeClr>
-                </a:solidFill>
-                <a:latin typeface="Montserrat" pitchFamily="2" charset="-52"/>
-              </a:rPr>
-              <a:t>, только краткие тезисы!</a:t>
-            </a:r>
-            <a:endParaRPr lang="ru-RU" sz="2000" dirty="0">
-              <a:solidFill>
-                <a:schemeClr val="tx2">
-                  <a:lumMod val="50000"/>
-                </a:schemeClr>
-              </a:solidFill>
-              <a:latin typeface="Montserrat" pitchFamily="2" charset="-52"/>
-            </a:endParaRPr>
-          </a:p>
-        </p:txBody>
-      </p:sp>
-      <p:sp>
-        <p:nvSpPr>
-          <p:cNvPr id="6" name="TextBox 5"/>
-          <p:cNvSpPr txBox="1"/>
-          <p:nvPr/>
-        </p:nvSpPr>
-        <p:spPr>
-          <a:xfrm>
-            <a:off x="3140364" y="5903709"/>
-            <a:ext cx="6200736" cy="400110"/>
-          </a:xfrm>
-          <a:prstGeom prst="rect">
-            <a:avLst/>
-          </a:prstGeom>
-          <a:noFill/>
-        </p:spPr>
-        <p:txBody>
-          <a:bodyPr wrap="none" rtlCol="0">
-            <a:spAutoFit/>
-          </a:bodyPr>
-          <a:lstStyle/>
-          <a:p>
-            <a:r>
-              <a:rPr lang="ru-RU" sz="2000" dirty="0">
-                <a:solidFill>
-                  <a:schemeClr val="tx2">
-                    <a:lumMod val="50000"/>
-                  </a:schemeClr>
-                </a:solidFill>
-                <a:latin typeface="Montserrat" pitchFamily="2" charset="-52"/>
-              </a:rPr>
-              <a:t>Мы верим, что у тебя всё получится! Дерзай!</a:t>
-            </a:r>
-            <a:endParaRPr lang="ru-RU" sz="2000" dirty="0">
-              <a:solidFill>
-                <a:schemeClr val="tx2">
-                  <a:lumMod val="50000"/>
-                </a:schemeClr>
-              </a:solidFill>
-              <a:latin typeface="Montserrat" pitchFamily="2" charset="-52"/>
-            </a:endParaRPr>
-          </a:p>
-        </p:txBody>
-      </p:sp>
-      <p:sp>
-        <p:nvSpPr>
-          <p:cNvPr id="4" name="Текстовое поле 3"/>
-          <p:cNvSpPr txBox="1"/>
-          <p:nvPr/>
-        </p:nvSpPr>
-        <p:spPr>
-          <a:xfrm>
-            <a:off x="3140075" y="4332605"/>
-            <a:ext cx="6096000" cy="1198880"/>
-          </a:xfrm>
-          <a:prstGeom prst="rect">
-            <a:avLst/>
-          </a:prstGeom>
-          <a:noFill/>
-        </p:spPr>
-        <p:txBody>
-          <a:bodyPr wrap="square" rtlCol="0">
-            <a:spAutoFit/>
-          </a:bodyPr>
-          <a:p>
-            <a:r>
-              <a:rPr lang="ru-RU" altLang="en-US" sz="7200">
-                <a:sym typeface="+mn-ea"/>
-              </a:rPr>
-              <a:t>УДАЛИТЬ</a:t>
-            </a:r>
-            <a:endParaRPr lang="ru-RU" altLang="en-US" sz="7200"/>
-          </a:p>
-        </p:txBody>
-      </p:sp>
-    </p:spTree>
-  </p:cSld>
-  <p:clrMapOvr>
-    <a:masterClrMapping/>
-  </p:clrMapOvr>
-</p:sld>
-</file>
-
-<file path=ppt/slides/slide4.xml><?xml version="1.0" encoding="utf-8"?>
-<p:sld xmlns:a="http://schemas.openxmlformats.org/drawingml/2006/main" xmlns:r="http://schemas.openxmlformats.org/officeDocument/2006/relationships" xmlns:p="http://schemas.openxmlformats.org/presentationml/2006/main">
-  <p:cSld>
     <p:bg>
       <p:bgPr>
         <a:blipFill dpi="0" rotWithShape="1">
-          <a:blip r:embed="rId1">
+          <a:blip r:embed="rId2">
             <a:lum/>
           </a:blip>
           <a:srcRect/>
@@ -4334,8 +3755,8 @@
         </p:nvSpPr>
         <p:spPr>
           <a:xfrm>
-            <a:off x="5130799" y="256598"/>
-            <a:ext cx="6873998" cy="584775"/>
+            <a:off x="6512137" y="256598"/>
+            <a:ext cx="5440913" cy="584775"/>
           </a:xfrm>
           <a:prstGeom prst="rect">
             <a:avLst/>
@@ -4357,16 +3778,8 @@
                 </a:solidFill>
                 <a:latin typeface="Montserrat ExtraBold" pitchFamily="2" charset="-52"/>
               </a:rPr>
-              <a:t>Актуальность и суть проекта</a:t>
-            </a:r>
-            <a:endParaRPr lang="ru-RU" sz="3200" dirty="0">
-              <a:solidFill>
-                <a:schemeClr val="tx2">
-                  <a:lumMod val="50000"/>
-                </a:schemeClr>
-              </a:solidFill>
-              <a:latin typeface="Montserrat ExtraBold" pitchFamily="2" charset="-52"/>
-            </a:endParaRPr>
+              <a:t>Цель и задачи проекта</a:t>
+            </a:r>
           </a:p>
         </p:txBody>
       </p:sp>
@@ -4379,7 +3792,7 @@
         <p:spPr>
           <a:xfrm>
             <a:off x="320059" y="2054877"/>
-            <a:ext cx="11210290" cy="2245360"/>
+            <a:ext cx="11296015" cy="1630045"/>
           </a:xfrm>
           <a:prstGeom prst="rect">
             <a:avLst/>
@@ -4394,7 +3807,7 @@
           <a:p>
             <a:pPr algn="l"/>
             <a:r>
-              <a:rPr lang="ru-RU" sz="2000" b="1" dirty="0">
+              <a:rPr lang="ru-RU" sz="2000" dirty="0">
                 <a:solidFill>
                   <a:schemeClr val="tx2">
                     <a:lumMod val="50000"/>
@@ -4402,22 +3815,8 @@
                 </a:solidFill>
                 <a:latin typeface="Montserrat" pitchFamily="2" charset="-52"/>
               </a:rPr>
-              <a:t>Какую проблему решает ваш проект? </a:t>
-            </a:r>
-            <a:endParaRPr lang="ru-RU" sz="2000" b="1" dirty="0">
-              <a:solidFill>
-                <a:schemeClr val="tx2">
-                  <a:lumMod val="50000"/>
-                </a:schemeClr>
-              </a:solidFill>
-              <a:latin typeface="Montserrat" pitchFamily="2" charset="-52"/>
-            </a:endParaRPr>
-          </a:p>
-          <a:p>
-            <a:pPr marL="342900" indent="-342900" algn="l">
-              <a:buFont typeface="Arial" panose="020B0604020202020204" pitchFamily="34" charset="0"/>
-              <a:buChar char="•"/>
-            </a:pPr>
+              <a:t>Цель – Спроектировать и р</a:t>
+            </a:r>
             <a:r>
               <a:rPr lang="en-US" altLang="en-US" sz="2000" dirty="0">
                 <a:solidFill>
@@ -4427,7 +3826,29 @@
                 </a:solidFill>
                 <a:latin typeface="Montserrat" pitchFamily="2" charset="-52"/>
               </a:rPr>
-              <a:t>Жанр 2</a:t>
+              <a:t>азработать </a:t>
+            </a:r>
+            <a:r>
+              <a:rPr lang="ru-RU" altLang="en-US" sz="2000" dirty="0">
+                <a:solidFill>
+                  <a:schemeClr val="tx2">
+                    <a:lumMod val="50000"/>
+                  </a:schemeClr>
+                </a:solidFill>
+                <a:latin typeface="Montserrat" pitchFamily="2" charset="-52"/>
+              </a:rPr>
+              <a:t>игру</a:t>
+            </a:r>
+            <a:r>
+              <a:rPr lang="en-US" altLang="en-US" sz="2000" dirty="0">
+                <a:solidFill>
+                  <a:schemeClr val="tx2">
+                    <a:lumMod val="50000"/>
+                  </a:schemeClr>
+                </a:solidFill>
+                <a:latin typeface="Montserrat" pitchFamily="2" charset="-52"/>
+              </a:rPr>
+              <a:t> 2</a:t>
             </a:r>
             <a:r>
               <a:rPr lang="en-US" altLang="ru-RU" sz="2000" dirty="0">
@@ -4449,22 +3870,19 @@
                 </a:solidFill>
                 <a:latin typeface="Montserrat" pitchFamily="2" charset="-52"/>
               </a:rPr>
-              <a:t>платформеров переживает «золотой век» в инди-индустрии.</a:t>
-            </a:r>
-            <a:endParaRPr lang="en-US" altLang="ru-RU" sz="2000" dirty="0">
-              <a:solidFill>
-                <a:schemeClr val="tx2">
-                  <a:lumMod val="50000"/>
-                </a:schemeClr>
-              </a:solidFill>
-              <a:latin typeface="Montserrat" pitchFamily="2" charset="-52"/>
-            </a:endParaRPr>
-          </a:p>
-          <a:p>
-            <a:pPr marL="342900" indent="-342900" algn="l">
-              <a:buFont typeface="Arial" panose="020B0604020202020204" pitchFamily="34" charset="0"/>
-              <a:buChar char="•"/>
-            </a:pPr>
+              <a:t>платформер</a:t>
+            </a:r>
+            <a:r>
+              <a:rPr lang="ru-RU" altLang="en-US" sz="2000" dirty="0">
+                <a:solidFill>
+                  <a:schemeClr val="tx2">
+                    <a:lumMod val="50000"/>
+                  </a:schemeClr>
+                </a:solidFill>
+                <a:latin typeface="Montserrat" pitchFamily="2" charset="-52"/>
+              </a:rPr>
+              <a:t> на движке </a:t>
+            </a:r>
             <a:r>
               <a:rPr lang="en-US" altLang="en-US" sz="2000" dirty="0">
                 <a:solidFill>
@@ -4474,21 +3892,13 @@
                 </a:solidFill>
                 <a:latin typeface="Montserrat" pitchFamily="2" charset="-52"/>
               </a:rPr>
-              <a:t>Игроки ищут уникальные сочетания механик и высокую сложность.</a:t>
-            </a:r>
-            <a:endParaRPr lang="en-US" altLang="en-US" sz="2000" dirty="0">
-              <a:solidFill>
-                <a:schemeClr val="tx2">
-                  <a:lumMod val="50000"/>
-                </a:schemeClr>
-              </a:solidFill>
-              <a:latin typeface="Montserrat" pitchFamily="2" charset="-52"/>
-            </a:endParaRPr>
+              <a:t>Unity .</a:t>
+            </a:r>
           </a:p>
           <a:p>
             <a:pPr algn="l"/>
             <a:r>
-              <a:rPr lang="ru-RU" sz="2000" b="1" dirty="0">
+              <a:rPr lang="ru-RU" sz="2000" dirty="0">
                 <a:solidFill>
                   <a:schemeClr val="tx2">
                     <a:lumMod val="50000"/>
@@ -4496,32 +3906,7 @@
                 </a:solidFill>
                 <a:latin typeface="Montserrat" pitchFamily="2" charset="-52"/>
               </a:rPr>
-              <a:t>Какова его степень важности в данный момент?</a:t>
-            </a:r>
-            <a:endParaRPr lang="ru-RU" sz="2000" b="1" dirty="0">
-              <a:solidFill>
-                <a:schemeClr val="tx2">
-                  <a:lumMod val="50000"/>
-                </a:schemeClr>
-              </a:solidFill>
-              <a:latin typeface="Montserrat" pitchFamily="2" charset="-52"/>
-            </a:endParaRPr>
-          </a:p>
-          <a:p>
-            <a:pPr marL="342900" indent="-342900" algn="l">
-              <a:buFont typeface="Arial" panose="020B0604020202020204" pitchFamily="34" charset="0"/>
-              <a:buChar char="•"/>
-            </a:pPr>
-            <a:r>
-              <a:rPr lang="en-US" altLang="en-US" sz="2000" dirty="0">
-                <a:solidFill>
-                  <a:schemeClr val="tx2">
-                    <a:lumMod val="50000"/>
-                  </a:schemeClr>
-                </a:solidFill>
-                <a:latin typeface="Montserrat" pitchFamily="2" charset="-52"/>
-              </a:rPr>
-              <a:t>Проект развивает навыки геймдизайна и программирования на </a:t>
+              <a:t>Задач</a:t>
             </a:r>
             <a:r>
               <a:rPr lang="en-US" altLang="ru-RU" sz="2000" dirty="0">
@@ -4532,10 +3917,15 @@
                 </a:solidFill>
                 <a:latin typeface="Montserrat" pitchFamily="2" charset="-52"/>
               </a:rPr>
-              <a:t>C# </a:t>
-            </a:r>
-            <a:r>
-              <a:rPr lang="en-US" altLang="en-US" sz="2000" dirty="0">
+              <a:t>:</a:t>
+            </a:r>
+          </a:p>
+          <a:p>
+            <a:pPr marL="457200" indent="-457200" algn="l">
+              <a:buAutoNum type="arabicPeriod"/>
+            </a:pPr>
+            <a:r>
+              <a:rPr lang="ru-RU" altLang="ru-RU" sz="2000" dirty="0">
                 <a:solidFill>
                   <a:schemeClr val="tx2">
                     <a:lumMod val="50000"/>
@@ -4543,7 +3933,7 @@
                 </a:solidFill>
                 <a:latin typeface="Montserrat" pitchFamily="2" charset="-52"/>
               </a:rPr>
-              <a:t>в среде </a:t>
+              <a:t>Изучить механики </a:t>
             </a:r>
             <a:r>
               <a:rPr lang="en-US" altLang="ru-RU" sz="2000" dirty="0">
@@ -4554,38 +3944,95 @@
                 </a:solidFill>
                 <a:latin typeface="Montserrat" pitchFamily="2" charset="-52"/>
               </a:rPr>
-              <a:t>Unity.</a:t>
-            </a:r>
-            <a:endParaRPr lang="en-US" altLang="ru-RU" sz="2000" dirty="0">
-              <a:solidFill>
-                <a:schemeClr val="tx2">
-                  <a:lumMod val="50000"/>
-                </a:schemeClr>
-              </a:solidFill>
-              <a:latin typeface="Montserrat" pitchFamily="2" charset="-52"/>
-            </a:endParaRPr>
-          </a:p>
-          <a:p>
-            <a:pPr algn="l"/>
-            <a:endParaRPr lang="ru-RU" sz="2000" b="1" dirty="0">
-              <a:solidFill>
-                <a:schemeClr val="tx2">
-                  <a:lumMod val="50000"/>
-                </a:schemeClr>
-              </a:solidFill>
-              <a:latin typeface="Montserrat" pitchFamily="2" charset="-52"/>
-            </a:endParaRPr>
-          </a:p>
-          <a:p>
-            <a:pPr algn="l"/>
-            <a:endParaRPr lang="ru-RU" sz="2000" b="1" dirty="0">
-              <a:solidFill>
-                <a:schemeClr val="tx2">
-                  <a:lumMod val="50000"/>
-                </a:schemeClr>
-              </a:solidFill>
-              <a:latin typeface="Montserrat" pitchFamily="2" charset="-52"/>
-            </a:endParaRPr>
+              <a:t>Cinemachine, Tilemap,</a:t>
+            </a:r>
+            <a:r>
+              <a:rPr lang="ru-RU" altLang="ru-RU" sz="2000" dirty="0">
+                <a:solidFill>
+                  <a:schemeClr val="tx2">
+                    <a:lumMod val="50000"/>
+                  </a:schemeClr>
+                </a:solidFill>
+                <a:latin typeface="Montserrat" pitchFamily="2" charset="-52"/>
+              </a:rPr>
+              <a:t> джоинтов, эффекторов, </a:t>
+            </a:r>
+            <a:r>
+              <a:rPr lang="en-US" altLang="ru-RU" sz="2000" dirty="0">
+                <a:solidFill>
+                  <a:schemeClr val="tx2">
+                    <a:lumMod val="50000"/>
+                  </a:schemeClr>
+                </a:solidFill>
+                <a:latin typeface="Montserrat" pitchFamily="2" charset="-52"/>
+              </a:rPr>
+              <a:t>sprite render </a:t>
+            </a:r>
+            <a:r>
+              <a:rPr lang="ru-RU" altLang="ru-RU" sz="2000" dirty="0">
+                <a:solidFill>
+                  <a:schemeClr val="tx2">
+                    <a:lumMod val="50000"/>
+                  </a:schemeClr>
+                </a:solidFill>
+                <a:latin typeface="Montserrat" pitchFamily="2" charset="-52"/>
+              </a:rPr>
+              <a:t>и др.</a:t>
+            </a:r>
+          </a:p>
+          <a:p>
+            <a:pPr marL="457200" indent="-457200" algn="l">
+              <a:buAutoNum type="arabicPeriod"/>
+            </a:pPr>
+            <a:r>
+              <a:rPr lang="ru-RU" altLang="ru-RU" sz="2000" dirty="0">
+                <a:solidFill>
+                  <a:schemeClr val="tx2">
+                    <a:lumMod val="50000"/>
+                  </a:schemeClr>
+                </a:solidFill>
+                <a:latin typeface="Montserrat" pitchFamily="2" charset="-52"/>
+              </a:rPr>
+              <a:t>Написать код для механик 2</a:t>
+            </a:r>
+            <a:r>
+              <a:rPr lang="en-US" altLang="ru-RU" sz="2000" dirty="0">
+                <a:solidFill>
+                  <a:schemeClr val="tx2">
+                    <a:lumMod val="50000"/>
+                  </a:schemeClr>
+                </a:solidFill>
+                <a:latin typeface="Montserrat" pitchFamily="2" charset="-52"/>
+              </a:rPr>
+              <a:t>d </a:t>
+            </a:r>
+            <a:r>
+              <a:rPr lang="ru-RU" altLang="ru-RU" sz="2000" dirty="0">
+                <a:solidFill>
+                  <a:schemeClr val="tx2">
+                    <a:lumMod val="50000"/>
+                  </a:schemeClr>
+                </a:solidFill>
+                <a:latin typeface="Montserrat" pitchFamily="2" charset="-52"/>
+              </a:rPr>
+              <a:t>платформера</a:t>
+            </a:r>
+          </a:p>
+          <a:p>
+            <a:pPr marL="457200" indent="-457200" algn="l">
+              <a:buAutoNum type="arabicPeriod"/>
+            </a:pPr>
+            <a:r>
+              <a:rPr lang="ru-RU" altLang="ru-RU" sz="2000" dirty="0">
+                <a:solidFill>
+                  <a:schemeClr val="tx2">
+                    <a:lumMod val="50000"/>
+                  </a:schemeClr>
+                </a:solidFill>
+                <a:latin typeface="Montserrat" pitchFamily="2" charset="-52"/>
+              </a:rPr>
+              <a:t>Создать проект!</a:t>
+            </a:r>
           </a:p>
         </p:txBody>
       </p:sp>
@@ -4597,13 +4044,13 @@
 </p:sld>
 </file>
 
-<file path=ppt/slides/slide5.xml><?xml version="1.0" encoding="utf-8"?>
+<file path=ppt/slides/slide4.xml><?xml version="1.0" encoding="utf-8"?>
 <p:sld xmlns:a="http://schemas.openxmlformats.org/drawingml/2006/main" xmlns:r="http://schemas.openxmlformats.org/officeDocument/2006/relationships" xmlns:p="http://schemas.openxmlformats.org/presentationml/2006/main">
   <p:cSld>
     <p:bg>
       <p:bgPr>
         <a:blipFill dpi="0" rotWithShape="1">
-          <a:blip r:embed="rId1">
+          <a:blip r:embed="rId2">
             <a:lum/>
           </a:blip>
           <a:srcRect/>
@@ -4636,8 +4083,8 @@
         </p:nvSpPr>
         <p:spPr>
           <a:xfrm>
-            <a:off x="6512137" y="256598"/>
-            <a:ext cx="5440913" cy="584775"/>
+            <a:off x="4275833" y="256598"/>
+            <a:ext cx="7726795" cy="584775"/>
           </a:xfrm>
           <a:prstGeom prst="rect">
             <a:avLst/>
@@ -4659,16 +4106,8 @@
                 </a:solidFill>
                 <a:latin typeface="Montserrat ExtraBold" pitchFamily="2" charset="-52"/>
               </a:rPr>
-              <a:t>Цель и задачи проекта</a:t>
-            </a:r>
-            <a:endParaRPr lang="ru-RU" sz="3200" dirty="0">
-              <a:solidFill>
-                <a:schemeClr val="tx2">
-                  <a:lumMod val="50000"/>
-                </a:schemeClr>
-              </a:solidFill>
-              <a:latin typeface="Montserrat ExtraBold" pitchFamily="2" charset="-52"/>
-            </a:endParaRPr>
+              <a:t>Анализ существующих решений</a:t>
+            </a:r>
           </a:p>
         </p:txBody>
       </p:sp>
@@ -4681,7 +4120,7 @@
         <p:spPr>
           <a:xfrm>
             <a:off x="320059" y="2054877"/>
-            <a:ext cx="11296015" cy="1630045"/>
+            <a:ext cx="9910085" cy="1938992"/>
           </a:xfrm>
           <a:prstGeom prst="rect">
             <a:avLst/>
@@ -4694,7 +4133,6 @@
           </a:bodyPr>
           <a:lstStyle/>
           <a:p>
-            <a:pPr algn="l"/>
             <a:r>
               <a:rPr lang="ru-RU" sz="2000" dirty="0">
                 <a:solidFill>
@@ -4704,96 +4142,10 @@
                 </a:solidFill>
                 <a:latin typeface="Montserrat" pitchFamily="2" charset="-52"/>
               </a:rPr>
-              <a:t>Цель – Спроектировать и р</a:t>
-            </a:r>
-            <a:r>
-              <a:rPr lang="en-US" altLang="en-US" sz="2000" dirty="0">
-                <a:solidFill>
-                  <a:schemeClr val="tx2">
-                    <a:lumMod val="50000"/>
-                  </a:schemeClr>
-                </a:solidFill>
-                <a:latin typeface="Montserrat" pitchFamily="2" charset="-52"/>
-              </a:rPr>
-              <a:t>азработать </a:t>
-            </a:r>
-            <a:r>
-              <a:rPr lang="ru-RU" altLang="en-US" sz="2000" dirty="0">
-                <a:solidFill>
-                  <a:schemeClr val="tx2">
-                    <a:lumMod val="50000"/>
-                  </a:schemeClr>
-                </a:solidFill>
-                <a:latin typeface="Montserrat" pitchFamily="2" charset="-52"/>
-              </a:rPr>
-              <a:t>игру</a:t>
-            </a:r>
-            <a:r>
-              <a:rPr lang="en-US" altLang="en-US" sz="2000" dirty="0">
-                <a:solidFill>
-                  <a:schemeClr val="tx2">
-                    <a:lumMod val="50000"/>
-                  </a:schemeClr>
-                </a:solidFill>
-                <a:latin typeface="Montserrat" pitchFamily="2" charset="-52"/>
-              </a:rPr>
-              <a:t> 2</a:t>
-            </a:r>
-            <a:r>
-              <a:rPr lang="en-US" altLang="ru-RU" sz="2000" dirty="0">
-                <a:solidFill>
-                  <a:schemeClr val="tx2">
-                    <a:lumMod val="50000"/>
-                  </a:schemeClr>
-                </a:solidFill>
-                <a:latin typeface="Montserrat" pitchFamily="2" charset="-52"/>
-              </a:rPr>
-              <a:t>D-</a:t>
-            </a:r>
-            <a:r>
-              <a:rPr lang="en-US" altLang="en-US" sz="2000" dirty="0">
-                <a:solidFill>
-                  <a:schemeClr val="tx2">
-                    <a:lumMod val="50000"/>
-                  </a:schemeClr>
-                </a:solidFill>
-                <a:latin typeface="Montserrat" pitchFamily="2" charset="-52"/>
-              </a:rPr>
-              <a:t>платформер</a:t>
-            </a:r>
-            <a:r>
-              <a:rPr lang="ru-RU" altLang="en-US" sz="2000" dirty="0">
-                <a:solidFill>
-                  <a:schemeClr val="tx2">
-                    <a:lumMod val="50000"/>
-                  </a:schemeClr>
-                </a:solidFill>
-                <a:latin typeface="Montserrat" pitchFamily="2" charset="-52"/>
-              </a:rPr>
-              <a:t> на движке </a:t>
-            </a:r>
-            <a:r>
-              <a:rPr lang="en-US" altLang="en-US" sz="2000" dirty="0">
-                <a:solidFill>
-                  <a:schemeClr val="tx2">
-                    <a:lumMod val="50000"/>
-                  </a:schemeClr>
-                </a:solidFill>
-                <a:latin typeface="Montserrat" pitchFamily="2" charset="-52"/>
-              </a:rPr>
-              <a:t>Unity .</a:t>
-            </a:r>
-            <a:endParaRPr lang="en-US" altLang="en-US" sz="2000" dirty="0">
-              <a:solidFill>
-                <a:schemeClr val="tx2">
-                  <a:lumMod val="50000"/>
-                </a:schemeClr>
-              </a:solidFill>
-              <a:latin typeface="Montserrat" pitchFamily="2" charset="-52"/>
-            </a:endParaRPr>
-          </a:p>
-          <a:p>
-            <a:pPr algn="l"/>
+              <a:t>Возможно, что у твоего проекта есть аналоги</a:t>
+            </a:r>
+          </a:p>
+          <a:p>
             <a:r>
               <a:rPr lang="ru-RU" sz="2000" dirty="0">
                 <a:solidFill>
@@ -4803,10 +4155,22 @@
                 </a:solidFill>
                 <a:latin typeface="Montserrat" pitchFamily="2" charset="-52"/>
               </a:rPr>
-              <a:t>Задач</a:t>
-            </a:r>
-            <a:r>
-              <a:rPr lang="en-US" altLang="ru-RU" sz="2000" dirty="0">
+              <a:t>Добавь на этот слайд фото и краткие описания аналогов</a:t>
+            </a:r>
+          </a:p>
+          <a:p>
+            <a:endParaRPr lang="ru-RU" sz="2000" dirty="0">
+              <a:solidFill>
+                <a:schemeClr val="tx2">
+                  <a:lumMod val="50000"/>
+                </a:schemeClr>
+              </a:solidFill>
+              <a:latin typeface="Montserrat" pitchFamily="2" charset="-52"/>
+            </a:endParaRPr>
+          </a:p>
+          <a:p>
+            <a:r>
+              <a:rPr lang="ru-RU" sz="2000" dirty="0">
                 <a:solidFill>
                   <a:schemeClr val="tx2">
                     <a:lumMod val="50000"/>
@@ -4814,23 +4178,12 @@
                 </a:solidFill>
                 <a:latin typeface="Montserrat" pitchFamily="2" charset="-52"/>
               </a:rPr>
-              <a:t>:</a:t>
-            </a:r>
-            <a:endParaRPr lang="en-US" altLang="ru-RU" sz="2000" dirty="0">
-              <a:solidFill>
-                <a:schemeClr val="tx2">
-                  <a:lumMod val="50000"/>
-                </a:schemeClr>
-              </a:solidFill>
-              <a:latin typeface="Montserrat" pitchFamily="2" charset="-52"/>
-            </a:endParaRPr>
-          </a:p>
-          <a:p>
-            <a:pPr marL="457200" indent="-457200" algn="l">
-              <a:buAutoNum type="arabicPeriod"/>
-            </a:pPr>
-            <a:r>
-              <a:rPr lang="ru-RU" altLang="ru-RU" sz="2000" dirty="0">
+              <a:t>А на следующем слайде проанализируй уже существующие варианты</a:t>
+            </a:r>
+          </a:p>
+          <a:p>
+            <a:r>
+              <a:rPr lang="ru-RU" sz="2000" dirty="0">
                 <a:solidFill>
                   <a:schemeClr val="tx2">
                     <a:lumMod val="50000"/>
@@ -4838,10 +4191,12 @@
                 </a:solidFill>
                 <a:latin typeface="Montserrat" pitchFamily="2" charset="-52"/>
               </a:rPr>
-              <a:t>Изучить механики </a:t>
-            </a:r>
-            <a:r>
-              <a:rPr lang="en-US" altLang="ru-RU" sz="2000" dirty="0">
+              <a:t>и ваш вариант решения проблемы. Выбери для них разные параметры:</a:t>
+            </a:r>
+          </a:p>
+          <a:p>
+            <a:r>
+              <a:rPr lang="ru-RU" sz="2000" dirty="0">
                 <a:solidFill>
                   <a:schemeClr val="tx2">
                     <a:lumMod val="50000"/>
@@ -4849,119 +4204,8 @@
                 </a:solidFill>
                 <a:latin typeface="Montserrat" pitchFamily="2" charset="-52"/>
               </a:rPr>
-              <a:t>Cinemachine, Tilemap,</a:t>
-            </a:r>
-            <a:r>
-              <a:rPr lang="ru-RU" altLang="ru-RU" sz="2000" dirty="0">
-                <a:solidFill>
-                  <a:schemeClr val="tx2">
-                    <a:lumMod val="50000"/>
-                  </a:schemeClr>
-                </a:solidFill>
-                <a:latin typeface="Montserrat" pitchFamily="2" charset="-52"/>
-              </a:rPr>
-              <a:t> джоинтов, эффекторов, </a:t>
-            </a:r>
-            <a:r>
-              <a:rPr lang="en-US" altLang="ru-RU" sz="2000" dirty="0">
-                <a:solidFill>
-                  <a:schemeClr val="tx2">
-                    <a:lumMod val="50000"/>
-                  </a:schemeClr>
-                </a:solidFill>
-                <a:latin typeface="Montserrat" pitchFamily="2" charset="-52"/>
-              </a:rPr>
-              <a:t>sprite render </a:t>
-            </a:r>
-            <a:r>
-              <a:rPr lang="ru-RU" altLang="ru-RU" sz="2000" dirty="0">
-                <a:solidFill>
-                  <a:schemeClr val="tx2">
-                    <a:lumMod val="50000"/>
-                  </a:schemeClr>
-                </a:solidFill>
-                <a:latin typeface="Montserrat" pitchFamily="2" charset="-52"/>
-              </a:rPr>
-              <a:t>и др.</a:t>
-            </a:r>
-            <a:endParaRPr lang="ru-RU" altLang="ru-RU" sz="2000" dirty="0">
-              <a:solidFill>
-                <a:schemeClr val="tx2">
-                  <a:lumMod val="50000"/>
-                </a:schemeClr>
-              </a:solidFill>
-              <a:latin typeface="Montserrat" pitchFamily="2" charset="-52"/>
-            </a:endParaRPr>
-          </a:p>
-          <a:p>
-            <a:pPr marL="457200" indent="-457200" algn="l">
-              <a:buAutoNum type="arabicPeriod"/>
-            </a:pPr>
-            <a:r>
-              <a:rPr lang="ru-RU" altLang="ru-RU" sz="2000" dirty="0">
-                <a:solidFill>
-                  <a:schemeClr val="tx2">
-                    <a:lumMod val="50000"/>
-                  </a:schemeClr>
-                </a:solidFill>
-                <a:latin typeface="Montserrat" pitchFamily="2" charset="-52"/>
-              </a:rPr>
-              <a:t>Написать код для механик 2</a:t>
-            </a:r>
-            <a:r>
-              <a:rPr lang="en-US" altLang="ru-RU" sz="2000" dirty="0">
-                <a:solidFill>
-                  <a:schemeClr val="tx2">
-                    <a:lumMod val="50000"/>
-                  </a:schemeClr>
-                </a:solidFill>
-                <a:latin typeface="Montserrat" pitchFamily="2" charset="-52"/>
-              </a:rPr>
-              <a:t>d </a:t>
-            </a:r>
-            <a:r>
-              <a:rPr lang="ru-RU" altLang="ru-RU" sz="2000" dirty="0">
-                <a:solidFill>
-                  <a:schemeClr val="tx2">
-                    <a:lumMod val="50000"/>
-                  </a:schemeClr>
-                </a:solidFill>
-                <a:latin typeface="Montserrat" pitchFamily="2" charset="-52"/>
-              </a:rPr>
-              <a:t>платформера</a:t>
-            </a:r>
-            <a:endParaRPr lang="ru-RU" altLang="ru-RU" sz="2000" dirty="0">
-              <a:solidFill>
-                <a:schemeClr val="tx2">
-                  <a:lumMod val="50000"/>
-                </a:schemeClr>
-              </a:solidFill>
-              <a:latin typeface="Montserrat" pitchFamily="2" charset="-52"/>
-            </a:endParaRPr>
-          </a:p>
-          <a:p>
-            <a:pPr marL="457200" indent="-457200" algn="l">
-              <a:buAutoNum type="arabicPeriod"/>
-            </a:pPr>
-            <a:r>
-              <a:rPr lang="ru-RU" altLang="ru-RU" sz="2000" dirty="0">
-                <a:solidFill>
-                  <a:schemeClr val="tx2">
-                    <a:lumMod val="50000"/>
-                  </a:schemeClr>
-                </a:solidFill>
-                <a:latin typeface="Montserrat" pitchFamily="2" charset="-52"/>
-              </a:rPr>
-              <a:t>Создать проект!</a:t>
-            </a:r>
-            <a:endParaRPr lang="ru-RU" altLang="ru-RU" sz="2000" dirty="0">
-              <a:solidFill>
-                <a:schemeClr val="tx2">
-                  <a:lumMod val="50000"/>
-                </a:schemeClr>
-              </a:solidFill>
-              <a:latin typeface="Montserrat" pitchFamily="2" charset="-52"/>
-            </a:endParaRPr>
+              <a:t>стоимость, затраты, материалы и т.п.</a:t>
+            </a:r>
           </a:p>
         </p:txBody>
       </p:sp>
@@ -4973,13 +4217,13 @@
 </p:sld>
 </file>
 
-<file path=ppt/slides/slide6.xml><?xml version="1.0" encoding="utf-8"?>
+<file path=ppt/slides/slide5.xml><?xml version="1.0" encoding="utf-8"?>
 <p:sld xmlns:a="http://schemas.openxmlformats.org/drawingml/2006/main" xmlns:r="http://schemas.openxmlformats.org/officeDocument/2006/relationships" xmlns:p="http://schemas.openxmlformats.org/presentationml/2006/main">
   <p:cSld>
     <p:bg>
       <p:bgPr>
         <a:blipFill dpi="0" rotWithShape="1">
-          <a:blip r:embed="rId1">
+          <a:blip r:embed="rId2">
             <a:lum/>
           </a:blip>
           <a:srcRect/>
@@ -5037,235 +4281,6 @@
               </a:rPr>
               <a:t>Анализ существующих решений</a:t>
             </a:r>
-            <a:endParaRPr lang="ru-RU" sz="3200" dirty="0">
-              <a:solidFill>
-                <a:schemeClr val="tx2">
-                  <a:lumMod val="50000"/>
-                </a:schemeClr>
-              </a:solidFill>
-              <a:latin typeface="Montserrat ExtraBold" pitchFamily="2" charset="-52"/>
-            </a:endParaRPr>
-          </a:p>
-        </p:txBody>
-      </p:sp>
-      <p:sp>
-        <p:nvSpPr>
-          <p:cNvPr id="5" name="TextBox 4"/>
-          <p:cNvSpPr txBox="1"/>
-          <p:nvPr/>
-        </p:nvSpPr>
-        <p:spPr>
-          <a:xfrm>
-            <a:off x="320059" y="2054877"/>
-            <a:ext cx="9910085" cy="1938992"/>
-          </a:xfrm>
-          <a:prstGeom prst="rect">
-            <a:avLst/>
-          </a:prstGeom>
-          <a:noFill/>
-        </p:spPr>
-        <p:txBody>
-          <a:bodyPr wrap="none" rtlCol="0">
-            <a:spAutoFit/>
-          </a:bodyPr>
-          <a:lstStyle/>
-          <a:p>
-            <a:r>
-              <a:rPr lang="ru-RU" sz="2000" dirty="0">
-                <a:solidFill>
-                  <a:schemeClr val="tx2">
-                    <a:lumMod val="50000"/>
-                  </a:schemeClr>
-                </a:solidFill>
-                <a:latin typeface="Montserrat" pitchFamily="2" charset="-52"/>
-              </a:rPr>
-              <a:t>Возможно, что у твоего проекта есть аналоги</a:t>
-            </a:r>
-            <a:endParaRPr lang="ru-RU" sz="2000" dirty="0">
-              <a:solidFill>
-                <a:schemeClr val="tx2">
-                  <a:lumMod val="50000"/>
-                </a:schemeClr>
-              </a:solidFill>
-              <a:latin typeface="Montserrat" pitchFamily="2" charset="-52"/>
-            </a:endParaRPr>
-          </a:p>
-          <a:p>
-            <a:r>
-              <a:rPr lang="ru-RU" sz="2000" dirty="0">
-                <a:solidFill>
-                  <a:schemeClr val="tx2">
-                    <a:lumMod val="50000"/>
-                  </a:schemeClr>
-                </a:solidFill>
-                <a:latin typeface="Montserrat" pitchFamily="2" charset="-52"/>
-              </a:rPr>
-              <a:t>Добавь на этот слайд фото и краткие описания аналогов</a:t>
-            </a:r>
-            <a:endParaRPr lang="ru-RU" sz="2000" dirty="0">
-              <a:solidFill>
-                <a:schemeClr val="tx2">
-                  <a:lumMod val="50000"/>
-                </a:schemeClr>
-              </a:solidFill>
-              <a:latin typeface="Montserrat" pitchFamily="2" charset="-52"/>
-            </a:endParaRPr>
-          </a:p>
-          <a:p>
-            <a:endParaRPr lang="ru-RU" sz="2000" dirty="0">
-              <a:solidFill>
-                <a:schemeClr val="tx2">
-                  <a:lumMod val="50000"/>
-                </a:schemeClr>
-              </a:solidFill>
-              <a:latin typeface="Montserrat" pitchFamily="2" charset="-52"/>
-            </a:endParaRPr>
-          </a:p>
-          <a:p>
-            <a:r>
-              <a:rPr lang="ru-RU" sz="2000" dirty="0">
-                <a:solidFill>
-                  <a:schemeClr val="tx2">
-                    <a:lumMod val="50000"/>
-                  </a:schemeClr>
-                </a:solidFill>
-                <a:latin typeface="Montserrat" pitchFamily="2" charset="-52"/>
-              </a:rPr>
-              <a:t>А на следующем слайде проанализируй уже существующие варианты</a:t>
-            </a:r>
-            <a:endParaRPr lang="ru-RU" sz="2000" dirty="0">
-              <a:solidFill>
-                <a:schemeClr val="tx2">
-                  <a:lumMod val="50000"/>
-                </a:schemeClr>
-              </a:solidFill>
-              <a:latin typeface="Montserrat" pitchFamily="2" charset="-52"/>
-            </a:endParaRPr>
-          </a:p>
-          <a:p>
-            <a:r>
-              <a:rPr lang="ru-RU" sz="2000" dirty="0">
-                <a:solidFill>
-                  <a:schemeClr val="tx2">
-                    <a:lumMod val="50000"/>
-                  </a:schemeClr>
-                </a:solidFill>
-                <a:latin typeface="Montserrat" pitchFamily="2" charset="-52"/>
-              </a:rPr>
-              <a:t>и ваш вариант решения проблемы. Выбери для них разные параметры:</a:t>
-            </a:r>
-            <a:endParaRPr lang="ru-RU" sz="2000" dirty="0">
-              <a:solidFill>
-                <a:schemeClr val="tx2">
-                  <a:lumMod val="50000"/>
-                </a:schemeClr>
-              </a:solidFill>
-              <a:latin typeface="Montserrat" pitchFamily="2" charset="-52"/>
-            </a:endParaRPr>
-          </a:p>
-          <a:p>
-            <a:r>
-              <a:rPr lang="ru-RU" sz="2000" dirty="0">
-                <a:solidFill>
-                  <a:schemeClr val="tx2">
-                    <a:lumMod val="50000"/>
-                  </a:schemeClr>
-                </a:solidFill>
-                <a:latin typeface="Montserrat" pitchFamily="2" charset="-52"/>
-              </a:rPr>
-              <a:t>стоимость, затраты, материалы и т.п.</a:t>
-            </a:r>
-            <a:endParaRPr lang="ru-RU" sz="2000" dirty="0">
-              <a:solidFill>
-                <a:schemeClr val="tx2">
-                  <a:lumMod val="50000"/>
-                </a:schemeClr>
-              </a:solidFill>
-              <a:latin typeface="Montserrat" pitchFamily="2" charset="-52"/>
-            </a:endParaRPr>
-          </a:p>
-        </p:txBody>
-      </p:sp>
-    </p:spTree>
-  </p:cSld>
-  <p:clrMapOvr>
-    <a:masterClrMapping/>
-  </p:clrMapOvr>
-</p:sld>
-</file>
-
-<file path=ppt/slides/slide7.xml><?xml version="1.0" encoding="utf-8"?>
-<p:sld xmlns:a="http://schemas.openxmlformats.org/drawingml/2006/main" xmlns:r="http://schemas.openxmlformats.org/officeDocument/2006/relationships" xmlns:p="http://schemas.openxmlformats.org/presentationml/2006/main">
-  <p:cSld>
-    <p:bg>
-      <p:bgPr>
-        <a:blipFill dpi="0" rotWithShape="1">
-          <a:blip r:embed="rId1">
-            <a:lum/>
-          </a:blip>
-          <a:srcRect/>
-          <a:stretch>
-            <a:fillRect/>
-          </a:stretch>
-        </a:blipFill>
-        <a:effectLst/>
-      </p:bgPr>
-    </p:bg>
-    <p:spTree>
-      <p:nvGrpSpPr>
-        <p:cNvPr id="1" name=""/>
-        <p:cNvGrpSpPr/>
-        <p:nvPr/>
-      </p:nvGrpSpPr>
-      <p:grpSpPr>
-        <a:xfrm>
-          <a:off x="0" y="0"/>
-          <a:ext cx="0" cy="0"/>
-          <a:chOff x="0" y="0"/>
-          <a:chExt cx="0" cy="0"/>
-        </a:xfrm>
-      </p:grpSpPr>
-      <p:sp>
-        <p:nvSpPr>
-          <p:cNvPr id="4" name="TextBox 3"/>
-          <p:cNvSpPr txBox="1"/>
-          <p:nvPr/>
-        </p:nvSpPr>
-        <p:spPr>
-          <a:xfrm>
-            <a:off x="4275833" y="256598"/>
-            <a:ext cx="7726795" cy="584775"/>
-          </a:xfrm>
-          <a:prstGeom prst="rect">
-            <a:avLst/>
-          </a:prstGeom>
-          <a:noFill/>
-        </p:spPr>
-        <p:txBody>
-          <a:bodyPr wrap="none" rtlCol="0">
-            <a:spAutoFit/>
-          </a:bodyPr>
-          <a:lstStyle/>
-          <a:p>
-            <a:r>
-              <a:rPr lang="ru-RU" sz="3200" dirty="0">
-                <a:solidFill>
-                  <a:schemeClr val="tx2">
-                    <a:lumMod val="50000"/>
-                  </a:schemeClr>
-                </a:solidFill>
-                <a:latin typeface="Montserrat ExtraBold" pitchFamily="2" charset="-52"/>
-              </a:rPr>
-              <a:t>Анализ существующих решений</a:t>
-            </a:r>
-            <a:endParaRPr lang="ru-RU" sz="3200" dirty="0">
-              <a:solidFill>
-                <a:schemeClr val="tx2">
-                  <a:lumMod val="50000"/>
-                </a:schemeClr>
-              </a:solidFill>
-              <a:latin typeface="Montserrat ExtraBold" pitchFamily="2" charset="-52"/>
-            </a:endParaRPr>
           </a:p>
         </p:txBody>
       </p:sp>
@@ -5288,10 +4303,34 @@
                 <a:tableStyleId>{69012ECD-51FC-41F1-AA8D-1B2483CD663E}</a:tableStyleId>
               </a:tblPr>
               <a:tblGrid>
-                <a:gridCol w="2887317"/>
-                <a:gridCol w="2887317"/>
-                <a:gridCol w="2887317"/>
-                <a:gridCol w="2887317"/>
+                <a:gridCol w="2887317">
+                  <a:extLst>
+                    <a:ext uri="{9D8B030D-6E8A-4147-A177-3AD203B41FA5}">
+                      <a16:colId xmlns:a16="http://schemas.microsoft.com/office/drawing/2014/main" val="20000"/>
+                    </a:ext>
+                  </a:extLst>
+                </a:gridCol>
+                <a:gridCol w="2887317">
+                  <a:extLst>
+                    <a:ext uri="{9D8B030D-6E8A-4147-A177-3AD203B41FA5}">
+                      <a16:colId xmlns:a16="http://schemas.microsoft.com/office/drawing/2014/main" val="20001"/>
+                    </a:ext>
+                  </a:extLst>
+                </a:gridCol>
+                <a:gridCol w="2887317">
+                  <a:extLst>
+                    <a:ext uri="{9D8B030D-6E8A-4147-A177-3AD203B41FA5}">
+                      <a16:colId xmlns:a16="http://schemas.microsoft.com/office/drawing/2014/main" val="20002"/>
+                    </a:ext>
+                  </a:extLst>
+                </a:gridCol>
+                <a:gridCol w="2887317">
+                  <a:extLst>
+                    <a:ext uri="{9D8B030D-6E8A-4147-A177-3AD203B41FA5}">
+                      <a16:colId xmlns:a16="http://schemas.microsoft.com/office/drawing/2014/main" val="20003"/>
+                    </a:ext>
+                  </a:extLst>
+                </a:gridCol>
               </a:tblGrid>
               <a:tr h="635598">
                 <a:tc>
@@ -5309,12 +4348,6 @@
                         </a:rPr>
                         <a:t>Параметр сравнения</a:t>
                       </a:r>
-                      <a:endParaRPr lang="ru-RU" sz="2000" dirty="0">
-                        <a:solidFill>
-                          <a:schemeClr val="bg1"/>
-                        </a:solidFill>
-                        <a:latin typeface="Montserrat SemiBold" pitchFamily="2" charset="-52"/>
-                      </a:endParaRPr>
                     </a:p>
                   </a:txBody>
                   <a:tcPr>
@@ -5375,9 +4408,6 @@
                         </a:rPr>
                         <a:t>Celeste</a:t>
                       </a:r>
-                      <a:endParaRPr lang="en-US" altLang="ru-RU" sz="2000" dirty="0">
-                        <a:latin typeface="Montserrat SemiBold" pitchFamily="2" charset="-52"/>
-                      </a:endParaRPr>
                     </a:p>
                   </a:txBody>
                   <a:tcPr>
@@ -5438,9 +4468,6 @@
                         </a:rPr>
                         <a:t>Hollow Knight</a:t>
                       </a:r>
-                      <a:endParaRPr lang="en-US" altLang="ru-RU" sz="2000" dirty="0">
-                        <a:latin typeface="Montserrat SemiBold" pitchFamily="2" charset="-52"/>
-                      </a:endParaRPr>
                     </a:p>
                   </a:txBody>
                   <a:tcPr>
@@ -5501,9 +4528,6 @@
                         </a:rPr>
                         <a:t>Ваше решение</a:t>
                       </a:r>
-                      <a:endParaRPr lang="ru-RU" sz="2000" dirty="0">
-                        <a:latin typeface="Montserrat SemiBold" pitchFamily="2" charset="-52"/>
-                      </a:endParaRPr>
                     </a:p>
                   </a:txBody>
                   <a:tcPr>
@@ -5552,6 +4576,11 @@
                     </a:solidFill>
                   </a:tcPr>
                 </a:tc>
+                <a:extLst>
+                  <a:ext uri="{0D108BD9-81ED-4DB2-BD59-A6C34878D82A}">
+                    <a16:rowId xmlns:a16="http://schemas.microsoft.com/office/drawing/2014/main" val="10000"/>
+                  </a:ext>
+                </a:extLst>
               </a:tr>
               <a:tr h="635598">
                 <a:tc>
@@ -5571,14 +4600,6 @@
                         </a:rPr>
                         <a:t>Тип боя</a:t>
                       </a:r>
-                      <a:endParaRPr lang="en-US" altLang="en-US" dirty="0">
-                        <a:solidFill>
-                          <a:schemeClr val="tx2">
-                            <a:lumMod val="50000"/>
-                          </a:schemeClr>
-                        </a:solidFill>
-                        <a:latin typeface="Montserrat SemiBold" pitchFamily="2" charset="-52"/>
-                      </a:endParaRPr>
                     </a:p>
                   </a:txBody>
                   <a:tcPr>
@@ -5636,9 +4657,6 @@
                         </a:rPr>
                         <a:t>Нет</a:t>
                       </a:r>
-                      <a:endParaRPr lang="ru-RU" dirty="0">
-                        <a:latin typeface="Montserrat" pitchFamily="2" charset="-52"/>
-                      </a:endParaRPr>
                     </a:p>
                   </a:txBody>
                   <a:tcPr>
@@ -5696,9 +4714,6 @@
                         </a:rPr>
                         <a:t>Ближний</a:t>
                       </a:r>
-                      <a:endParaRPr lang="en-US" altLang="en-US" dirty="0">
-                        <a:latin typeface="Montserrat" pitchFamily="2" charset="-52"/>
-                      </a:endParaRPr>
                     </a:p>
                   </a:txBody>
                   <a:tcPr>
@@ -5756,9 +4771,6 @@
                         </a:rPr>
                         <a:t>Дальний</a:t>
                       </a:r>
-                      <a:endParaRPr lang="ru-RU">
-                        <a:latin typeface="Montserrat" pitchFamily="2" charset="-52"/>
-                      </a:endParaRPr>
                     </a:p>
                   </a:txBody>
                   <a:tcPr>
@@ -5804,6 +4816,11 @@
                     </a:cell3D>
                   </a:tcPr>
                 </a:tc>
+                <a:extLst>
+                  <a:ext uri="{0D108BD9-81ED-4DB2-BD59-A6C34878D82A}">
+                    <a16:rowId xmlns:a16="http://schemas.microsoft.com/office/drawing/2014/main" val="10001"/>
+                  </a:ext>
+                </a:extLst>
               </a:tr>
               <a:tr h="635598">
                 <a:tc>
@@ -5823,14 +4840,6 @@
                         </a:rPr>
                         <a:t>Сложность</a:t>
                       </a:r>
-                      <a:endParaRPr lang="en-US" altLang="en-US" dirty="0">
-                        <a:solidFill>
-                          <a:schemeClr val="tx2">
-                            <a:lumMod val="50000"/>
-                          </a:schemeClr>
-                        </a:solidFill>
-                        <a:latin typeface="Montserrat SemiBold" pitchFamily="2" charset="-52"/>
-                      </a:endParaRPr>
                     </a:p>
                   </a:txBody>
                   <a:tcPr>
@@ -5888,9 +4897,6 @@
                         </a:rPr>
                         <a:t>Экстремальная</a:t>
                       </a:r>
-                      <a:endParaRPr lang="en-US" altLang="en-US" dirty="0">
-                        <a:latin typeface="Montserrat" pitchFamily="2" charset="-52"/>
-                      </a:endParaRPr>
                     </a:p>
                   </a:txBody>
                   <a:tcPr>
@@ -5948,9 +4954,6 @@
                         </a:rPr>
                         <a:t>Высокая</a:t>
                       </a:r>
-                      <a:endParaRPr lang="en-US" altLang="en-US" dirty="0">
-                        <a:latin typeface="Montserrat" pitchFamily="2" charset="-52"/>
-                      </a:endParaRPr>
                     </a:p>
                   </a:txBody>
                   <a:tcPr>
@@ -6008,9 +5011,6 @@
                         </a:rPr>
                         <a:t>Увеличивующаяся</a:t>
                       </a:r>
-                      <a:endParaRPr lang="ru-RU">
-                        <a:latin typeface="Montserrat" pitchFamily="2" charset="-52"/>
-                      </a:endParaRPr>
                     </a:p>
                   </a:txBody>
                   <a:tcPr>
@@ -6056,6 +5056,11 @@
                     </a:cell3D>
                   </a:tcPr>
                 </a:tc>
+                <a:extLst>
+                  <a:ext uri="{0D108BD9-81ED-4DB2-BD59-A6C34878D82A}">
+                    <a16:rowId xmlns:a16="http://schemas.microsoft.com/office/drawing/2014/main" val="10002"/>
+                  </a:ext>
+                </a:extLst>
               </a:tr>
               <a:tr h="635598">
                 <a:tc>
@@ -6090,14 +5095,6 @@
                         </a:rPr>
                         <a:t>Секреты</a:t>
                       </a:r>
-                      <a:endParaRPr lang="en-US" altLang="en-US" dirty="0">
-                        <a:solidFill>
-                          <a:schemeClr val="tx2">
-                            <a:lumMod val="50000"/>
-                          </a:schemeClr>
-                        </a:solidFill>
-                        <a:latin typeface="Montserrat SemiBold" pitchFamily="2" charset="-52"/>
-                      </a:endParaRPr>
                     </a:p>
                   </a:txBody>
                   <a:tcPr>
@@ -6155,9 +5152,6 @@
                         </a:rPr>
                         <a:t>Да</a:t>
                       </a:r>
-                      <a:endParaRPr lang="en-US" altLang="en-US" dirty="0">
-                        <a:latin typeface="Montserrat" pitchFamily="2" charset="-52"/>
-                      </a:endParaRPr>
                     </a:p>
                   </a:txBody>
                   <a:tcPr>
@@ -6215,9 +5209,6 @@
                         </a:rPr>
                         <a:t>Да</a:t>
                       </a:r>
-                      <a:endParaRPr lang="en-US" altLang="en-US" dirty="0">
-                        <a:latin typeface="Montserrat" pitchFamily="2" charset="-52"/>
-                      </a:endParaRPr>
                     </a:p>
                   </a:txBody>
                   <a:tcPr>
@@ -6275,9 +5266,6 @@
                         </a:rPr>
                         <a:t>1 скрытый уровень</a:t>
                       </a:r>
-                      <a:endParaRPr lang="en-US" altLang="en-US">
-                        <a:latin typeface="Montserrat" pitchFamily="2" charset="-52"/>
-                      </a:endParaRPr>
                     </a:p>
                   </a:txBody>
                   <a:tcPr>
@@ -6323,6 +5311,11 @@
                     </a:cell3D>
                   </a:tcPr>
                 </a:tc>
+                <a:extLst>
+                  <a:ext uri="{0D108BD9-81ED-4DB2-BD59-A6C34878D82A}">
+                    <a16:rowId xmlns:a16="http://schemas.microsoft.com/office/drawing/2014/main" val="10003"/>
+                  </a:ext>
+                </a:extLst>
               </a:tr>
               <a:tr h="635598">
                 <a:tc>
@@ -6357,14 +5350,6 @@
                         </a:rPr>
                         <a:t>Движок</a:t>
                       </a:r>
-                      <a:endParaRPr lang="en-US" altLang="en-US" dirty="0">
-                        <a:solidFill>
-                          <a:schemeClr val="tx2">
-                            <a:lumMod val="50000"/>
-                          </a:schemeClr>
-                        </a:solidFill>
-                        <a:latin typeface="Montserrat SemiBold" pitchFamily="2" charset="-52"/>
-                      </a:endParaRPr>
                     </a:p>
                   </a:txBody>
                   <a:tcPr>
@@ -6422,9 +5407,6 @@
                         </a:rPr>
                         <a:t>XNA</a:t>
                       </a:r>
-                      <a:endParaRPr lang="en-US" altLang="ru-RU">
-                        <a:latin typeface="Montserrat" pitchFamily="2" charset="-52"/>
-                      </a:endParaRPr>
                     </a:p>
                   </a:txBody>
                   <a:tcPr>
@@ -6482,9 +5464,6 @@
                         </a:rPr>
                         <a:t>Unity</a:t>
                       </a:r>
-                      <a:endParaRPr lang="en-US" altLang="ru-RU" dirty="0">
-                        <a:latin typeface="Montserrat" pitchFamily="2" charset="-52"/>
-                      </a:endParaRPr>
                     </a:p>
                   </a:txBody>
                   <a:tcPr>
@@ -6542,9 +5521,6 @@
                         </a:rPr>
                         <a:t>Unity</a:t>
                       </a:r>
-                      <a:endParaRPr lang="en-US" altLang="ru-RU">
-                        <a:latin typeface="Montserrat" pitchFamily="2" charset="-52"/>
-                      </a:endParaRPr>
                     </a:p>
                   </a:txBody>
                   <a:tcPr>
@@ -6590,6 +5566,11 @@
                     </a:cell3D>
                   </a:tcPr>
                 </a:tc>
+                <a:extLst>
+                  <a:ext uri="{0D108BD9-81ED-4DB2-BD59-A6C34878D82A}">
+                    <a16:rowId xmlns:a16="http://schemas.microsoft.com/office/drawing/2014/main" val="10004"/>
+                  </a:ext>
+                </a:extLst>
               </a:tr>
             </a:tbl>
           </a:graphicData>
@@ -6603,13 +5584,13 @@
 </p:sld>
 </file>
 
-<file path=ppt/slides/slide8.xml><?xml version="1.0" encoding="utf-8"?>
+<file path=ppt/slides/slide6.xml><?xml version="1.0" encoding="utf-8"?>
 <p:sld xmlns:a="http://schemas.openxmlformats.org/drawingml/2006/main" xmlns:r="http://schemas.openxmlformats.org/officeDocument/2006/relationships" xmlns:p="http://schemas.openxmlformats.org/presentationml/2006/main">
   <p:cSld>
     <p:bg>
       <p:bgPr>
         <a:blipFill dpi="0" rotWithShape="1">
-          <a:blip r:embed="rId1">
+          <a:blip r:embed="rId2">
             <a:lum/>
           </a:blip>
           <a:srcRect/>
@@ -6667,14 +5648,6 @@
               </a:rPr>
               <a:t>Потенциальные потребители</a:t>
             </a:r>
-            <a:endParaRPr lang="ru-RU" sz="3200" dirty="0">
-              <a:solidFill>
-                <a:schemeClr val="tx2">
-                  <a:lumMod val="50000"/>
-                </a:schemeClr>
-              </a:solidFill>
-              <a:latin typeface="Montserrat ExtraBold" pitchFamily="2" charset="-52"/>
-            </a:endParaRPr>
           </a:p>
         </p:txBody>
       </p:sp>
@@ -6698,6 +5671,7 @@
           <a:bodyPr wrap="square" rtlCol="0">
             <a:noAutofit/>
           </a:bodyPr>
+          <a:lstStyle/>
           <a:p>
             <a:pPr marL="285750" indent="-285750">
               <a:buFont typeface="Arial" panose="020B0604020202020204" pitchFamily="34" charset="0"/>
@@ -6710,10 +5684,6 @@
               </a:rPr>
               <a:t>Возраст: 14–35 лет.</a:t>
             </a:r>
-            <a:endParaRPr lang="en-US" altLang="en-US">
-              <a:latin typeface="Montserrat" charset="0"/>
-              <a:cs typeface="Montserrat" charset="0"/>
-            </a:endParaRPr>
           </a:p>
           <a:p>
             <a:pPr marL="285750" indent="-285750">
@@ -6737,10 +5707,6 @@
               </a:rPr>
               <a:t>Интересы: Любители инди-игр, ретро-гейминга и челленджей.</a:t>
             </a:r>
-            <a:endParaRPr lang="en-US" altLang="en-US">
-              <a:latin typeface="Montserrat" charset="0"/>
-              <a:cs typeface="Montserrat" charset="0"/>
-            </a:endParaRPr>
           </a:p>
           <a:p>
             <a:pPr marL="285750" indent="-285750">
@@ -6764,10 +5730,6 @@
               </a:rPr>
               <a:t>География: Весь мир</a:t>
             </a:r>
-            <a:endParaRPr lang="en-US" altLang="en-US">
-              <a:latin typeface="Montserrat" charset="0"/>
-              <a:cs typeface="Montserrat" charset="0"/>
-            </a:endParaRPr>
           </a:p>
           <a:p>
             <a:pPr marL="285750" indent="-285750">
@@ -6805,10 +5767,6 @@
               </a:rPr>
               <a:t>геймплей (зависящий от навыка).</a:t>
             </a:r>
-            <a:endParaRPr lang="en-US" altLang="en-US">
-              <a:latin typeface="Montserrat" charset="0"/>
-              <a:cs typeface="Montserrat" charset="0"/>
-            </a:endParaRPr>
           </a:p>
         </p:txBody>
       </p:sp>
@@ -6819,7 +5777,7 @@
           <p:nvPr/>
         </p:nvPicPr>
         <p:blipFill>
-          <a:blip r:embed="rId2"/>
+          <a:blip r:embed="rId3"/>
           <a:stretch>
             <a:fillRect/>
           </a:stretch>
@@ -6842,13 +5800,13 @@
 </p:sld>
 </file>
 
-<file path=ppt/slides/slide9.xml><?xml version="1.0" encoding="utf-8"?>
+<file path=ppt/slides/slide7.xml><?xml version="1.0" encoding="utf-8"?>
 <p:sld xmlns:a="http://schemas.openxmlformats.org/drawingml/2006/main" xmlns:r="http://schemas.openxmlformats.org/officeDocument/2006/relationships" xmlns:p="http://schemas.openxmlformats.org/presentationml/2006/main">
   <p:cSld>
     <p:bg>
       <p:bgPr>
         <a:blipFill dpi="0" rotWithShape="1">
-          <a:blip r:embed="rId1">
+          <a:blip r:embed="rId2">
             <a:lum/>
           </a:blip>
           <a:srcRect/>
@@ -6906,14 +5864,6 @@
               </a:rPr>
               <a:t>Описание достигнутого результата</a:t>
             </a:r>
-            <a:endParaRPr lang="ru-RU" sz="3200" dirty="0">
-              <a:solidFill>
-                <a:schemeClr val="tx2">
-                  <a:lumMod val="50000"/>
-                </a:schemeClr>
-              </a:solidFill>
-              <a:latin typeface="Montserrat ExtraBold" pitchFamily="2" charset="-52"/>
-            </a:endParaRPr>
           </a:p>
         </p:txBody>
       </p:sp>
@@ -6951,14 +5901,6 @@
               </a:rPr>
               <a:t>Как прошли предварительные испытания?</a:t>
             </a:r>
-            <a:endParaRPr lang="ru-RU" sz="2000" b="1" dirty="0">
-              <a:solidFill>
-                <a:schemeClr val="tx2">
-                  <a:lumMod val="50000"/>
-                </a:schemeClr>
-              </a:solidFill>
-              <a:latin typeface="Montserrat" pitchFamily="2" charset="-52"/>
-            </a:endParaRPr>
           </a:p>
           <a:p>
             <a:pPr marL="342900" indent="-342900" algn="l">
@@ -7111,7 +6053,7 @@
           <p:nvPr/>
         </p:nvPicPr>
         <p:blipFill>
-          <a:blip r:embed="rId2"/>
+          <a:blip r:embed="rId3"/>
           <a:stretch>
             <a:fillRect/>
           </a:stretch>
@@ -7135,7 +6077,7 @@
           <p:nvPr/>
         </p:nvPicPr>
         <p:blipFill>
-          <a:blip r:embed="rId3"/>
+          <a:blip r:embed="rId4"/>
           <a:stretch>
             <a:fillRect/>
           </a:stretch>
@@ -7159,7 +6101,7 @@
           <p:nvPr/>
         </p:nvPicPr>
         <p:blipFill>
-          <a:blip r:embed="rId4"/>
+          <a:blip r:embed="rId5"/>
           <a:stretch>
             <a:fillRect/>
           </a:stretch>
@@ -7183,7 +6125,7 @@
           <p:nvPr/>
         </p:nvPicPr>
         <p:blipFill>
-          <a:blip r:embed="rId5"/>
+          <a:blip r:embed="rId6"/>
           <a:stretch>
             <a:fillRect/>
           </a:stretch>
@@ -7457,6 +6399,8 @@
       </a:bgFillStyleLst>
     </a:fmtScheme>
   </a:themeElements>
+  <a:objectDefaults/>
+  <a:extraClrSchemeLst/>
   <a:extLst>
     <a:ext uri="{05A4C25C-085E-4340-85A3-A5531E510DB2}">
       <thm15:themeFamily xmlns:thm15="http://schemas.microsoft.com/office/thememl/2012/main" name="Office Theme" id="{62F939B6-93AF-4DB8-9C6B-D6C7DFDC589F}" vid="{4A3C46E8-61CC-4603-A589-7422A47A8E4A}"/>
@@ -7716,6 +6660,8 @@
       </a:bgFillStyleLst>
     </a:fmtScheme>
   </a:themeElements>
+  <a:objectDefaults/>
+  <a:extraClrSchemeLst/>
   <a:extLst>
     <a:ext uri="{05A4C25C-085E-4340-85A3-A5531E510DB2}">
       <thm15:themeFamily xmlns:thm15="http://schemas.microsoft.com/office/thememl/2012/main" name="Office Theme" id="{62F939B6-93AF-4DB8-9C6B-D6C7DFDC589F}" vid="{4A3C46E8-61CC-4603-A589-7422A47A8E4A}"/>
